--- a/cursos/recursos/formacion-ajedrez/04-sistemas-de-emparejamiento.pptx
+++ b/cursos/recursos/formacion-ajedrez/04-sistemas-de-emparejamiento.pptx
@@ -10,6 +10,22 @@
     <p:sldId id="258" r:id="rId9"/>
     <p:sldId id="259" r:id="rId10"/>
     <p:sldId id="260" r:id="rId11"/>
+    <p:sldId id="261" r:id="rId12"/>
+    <p:sldId id="262" r:id="rId13"/>
+    <p:sldId id="263" r:id="rId14"/>
+    <p:sldId id="264" r:id="rId15"/>
+    <p:sldId id="265" r:id="rId16"/>
+    <p:sldId id="266" r:id="rId17"/>
+    <p:sldId id="267" r:id="rId18"/>
+    <p:sldId id="268" r:id="rId19"/>
+    <p:sldId id="269" r:id="rId20"/>
+    <p:sldId id="270" r:id="rId21"/>
+    <p:sldId id="271" r:id="rId22"/>
+    <p:sldId id="272" r:id="rId23"/>
+    <p:sldId id="273" r:id="rId24"/>
+    <p:sldId id="274" r:id="rId25"/>
+    <p:sldId id="275" r:id="rId26"/>
+    <p:sldId id="276" r:id="rId27"/>
   </p:sldIdLst>
   <p:sldSz cx="12191695" cy="6858000" type="screen4x3"/>
   <p:notesSz cx="6858000" cy="9144000"/>
@@ -3481,6 +3497,2212 @@
 </p:sld>
 </file>
 
+<file path=ppt/slides/slide10.xml><?xml version="1.0" encoding="utf-8"?>
+<p:sld xmlns:a="http://schemas.openxmlformats.org/drawingml/2006/main" xmlns:p="http://schemas.openxmlformats.org/presentationml/2006/main" xmlns:r="http://schemas.openxmlformats.org/officeDocument/2006/relationships">
+  <p:cSld>
+    <p:spTree>
+      <p:nvGrpSpPr>
+        <p:cNvPr id="1" name=""/>
+        <p:cNvGrpSpPr/>
+        <p:nvPr/>
+      </p:nvGrpSpPr>
+      <p:grpSpPr/>
+      <p:sp>
+        <p:nvSpPr>
+          <p:cNvPr id="2" name="Rectangle 1"/>
+          <p:cNvSpPr/>
+          <p:nvPr/>
+        </p:nvSpPr>
+        <p:spPr>
+          <a:xfrm>
+            <a:off x="0" y="0"/>
+            <a:ext cx="12191695" cy="6858000"/>
+          </a:xfrm>
+          <a:prstGeom prst="rect">
+            <a:avLst/>
+          </a:prstGeom>
+          <a:solidFill>
+            <a:srgbClr val="102A43"/>
+          </a:solidFill>
+          <a:ln>
+            <a:noFill/>
+          </a:ln>
+          <a:effectLst/>
+        </p:spPr>
+        <p:style>
+          <a:lnRef idx="1">
+            <a:schemeClr val="accent1"/>
+          </a:lnRef>
+          <a:fillRef idx="3">
+            <a:schemeClr val="accent1"/>
+          </a:fillRef>
+          <a:effectRef idx="2">
+            <a:schemeClr val="accent1"/>
+          </a:effectRef>
+          <a:fontRef idx="minor">
+            <a:schemeClr val="lt1"/>
+          </a:fontRef>
+        </p:style>
+        <p:txBody>
+          <a:bodyPr rtlCol="0" anchor="ctr"/>
+          <a:lstStyle/>
+          <a:p>
+            <a:pPr algn="ctr"/>
+          </a:p>
+        </p:txBody>
+      </p:sp>
+      <p:sp>
+        <p:nvSpPr>
+          <p:cNvPr id="3" name="TextBox 2"/>
+          <p:cNvSpPr txBox="1"/>
+          <p:nvPr/>
+        </p:nvSpPr>
+        <p:spPr>
+          <a:xfrm>
+            <a:off x="548640" y="548640"/>
+            <a:ext cx="11064240" cy="457200"/>
+          </a:xfrm>
+          <a:prstGeom prst="rect">
+            <a:avLst/>
+          </a:prstGeom>
+          <a:noFill/>
+        </p:spPr>
+        <p:txBody>
+          <a:bodyPr wrap="square">
+            <a:spAutoFit/>
+          </a:bodyPr>
+          <a:lstStyle/>
+          <a:p>
+            <a:r>
+              <a:rPr sz="1400" b="1">
+                <a:solidFill>
+                  <a:srgbClr val="F0B429"/>
+                </a:solidFill>
+                <a:latin typeface="Calibri"/>
+              </a:rPr>
+              <a:t>CASO 1 · DECISIÓN</a:t>
+            </a:r>
+          </a:p>
+        </p:txBody>
+      </p:sp>
+      <p:sp>
+        <p:nvSpPr>
+          <p:cNvPr id="4" name="TextBox 3"/>
+          <p:cNvSpPr txBox="1"/>
+          <p:nvPr/>
+        </p:nvSpPr>
+        <p:spPr>
+          <a:xfrm>
+            <a:off x="548640" y="1051560"/>
+            <a:ext cx="11064240" cy="822960"/>
+          </a:xfrm>
+          <a:prstGeom prst="rect">
+            <a:avLst/>
+          </a:prstGeom>
+          <a:noFill/>
+        </p:spPr>
+        <p:txBody>
+          <a:bodyPr wrap="square">
+            <a:spAutoFit/>
+          </a:bodyPr>
+          <a:lstStyle/>
+          <a:p>
+            <a:r>
+              <a:rPr sz="2600" b="1">
+                <a:solidFill>
+                  <a:srgbClr val="FFFFFF"/>
+                </a:solidFill>
+                <a:latin typeface="Cambria"/>
+              </a:rPr>
+              <a:t>La ronda 2 de un suizo de 8 jugadores</a:t>
+            </a:r>
+          </a:p>
+        </p:txBody>
+      </p:sp>
+      <p:sp>
+        <p:nvSpPr>
+          <p:cNvPr id="5" name="TextBox 4"/>
+          <p:cNvSpPr txBox="1"/>
+          <p:nvPr/>
+        </p:nvSpPr>
+        <p:spPr>
+          <a:xfrm>
+            <a:off x="548640" y="2103120"/>
+            <a:ext cx="11064240" cy="3931920"/>
+          </a:xfrm>
+          <a:prstGeom prst="rect">
+            <a:avLst/>
+          </a:prstGeom>
+          <a:noFill/>
+        </p:spPr>
+        <p:txBody>
+          <a:bodyPr wrap="square">
+            <a:spAutoFit/>
+          </a:bodyPr>
+          <a:lstStyle/>
+          <a:p>
+            <a:r>
+              <a:rPr sz="1600" b="0">
+                <a:solidFill>
+                  <a:srgbClr val="CADCFC"/>
+                </a:solidFill>
+                <a:latin typeface="Calibri"/>
+              </a:rPr>
+              <a:t>Grupo de 1 punto: 1, 2, 7 y 8 (mitades {1, 2} y {7, 8}): 1 contra 7 y 2 contra 8. Grupo de 0: 3, 4, 5 y 6: 3 contra 5 y 4 contra 6. Colores alternados: 7 (tuvo negras) lleva blancas contra 1; 2 (tuvo negras) lleva blancas contra 8; 5 (tuvo negras) blancas contra 3; 4 (tuvo negras) blancas contra 6. Emparejamiento: 7–1, 2–8, 5–3, 4–6.</a:t>
+            </a:r>
+          </a:p>
+        </p:txBody>
+      </p:sp>
+      <p:sp>
+        <p:nvSpPr>
+          <p:cNvPr id="6" name="TextBox 5"/>
+          <p:cNvSpPr txBox="1"/>
+          <p:nvPr/>
+        </p:nvSpPr>
+        <p:spPr>
+          <a:xfrm>
+            <a:off x="548640" y="6263640"/>
+            <a:ext cx="11064240" cy="365760"/>
+          </a:xfrm>
+          <a:prstGeom prst="rect">
+            <a:avLst/>
+          </a:prstGeom>
+          <a:noFill/>
+        </p:spPr>
+        <p:txBody>
+          <a:bodyPr wrap="square">
+            <a:spAutoFit/>
+          </a:bodyPr>
+          <a:lstStyle/>
+          <a:p>
+            <a:r>
+              <a:rPr sz="1100" b="0">
+                <a:solidFill>
+                  <a:srgbClr val="9FB3C8"/>
+                </a:solidFill>
+                <a:latin typeface="Calibri"/>
+              </a:rPr>
+              <a:t>Fuente: Sistema holandés de la FIDE (Handbook C.04.3)</a:t>
+            </a:r>
+          </a:p>
+        </p:txBody>
+      </p:sp>
+    </p:spTree>
+  </p:cSld>
+  <p:clrMapOvr>
+    <a:masterClrMapping/>
+  </p:clrMapOvr>
+</p:sld>
+</file>
+
+<file path=ppt/slides/slide11.xml><?xml version="1.0" encoding="utf-8"?>
+<p:sld xmlns:a="http://schemas.openxmlformats.org/drawingml/2006/main" xmlns:p="http://schemas.openxmlformats.org/presentationml/2006/main" xmlns:r="http://schemas.openxmlformats.org/officeDocument/2006/relationships">
+  <p:cSld>
+    <p:spTree>
+      <p:nvGrpSpPr>
+        <p:cNvPr id="1" name=""/>
+        <p:cNvGrpSpPr/>
+        <p:nvPr/>
+      </p:nvGrpSpPr>
+      <p:grpSpPr/>
+      <p:sp>
+        <p:nvSpPr>
+          <p:cNvPr id="2" name="Oval 1"/>
+          <p:cNvSpPr/>
+          <p:nvPr/>
+        </p:nvSpPr>
+        <p:spPr>
+          <a:xfrm>
+            <a:off x="548640" y="502920"/>
+            <a:ext cx="502920" cy="502920"/>
+          </a:xfrm>
+          <a:prstGeom prst="ellipse">
+            <a:avLst/>
+          </a:prstGeom>
+          <a:solidFill>
+            <a:srgbClr val="DE911D"/>
+          </a:solidFill>
+          <a:ln>
+            <a:noFill/>
+          </a:ln>
+          <a:effectLst/>
+        </p:spPr>
+        <p:style>
+          <a:lnRef idx="1">
+            <a:schemeClr val="accent1"/>
+          </a:lnRef>
+          <a:fillRef idx="3">
+            <a:schemeClr val="accent1"/>
+          </a:fillRef>
+          <a:effectRef idx="2">
+            <a:schemeClr val="accent1"/>
+          </a:effectRef>
+          <a:fontRef idx="minor">
+            <a:schemeClr val="lt1"/>
+          </a:fontRef>
+        </p:style>
+        <p:txBody>
+          <a:bodyPr rtlCol="0" anchor="ctr"/>
+          <a:lstStyle/>
+          <a:p>
+            <a:pPr algn="ctr"/>
+          </a:p>
+        </p:txBody>
+      </p:sp>
+      <p:sp>
+        <p:nvSpPr>
+          <p:cNvPr id="3" name="TextBox 2"/>
+          <p:cNvSpPr txBox="1"/>
+          <p:nvPr/>
+        </p:nvSpPr>
+        <p:spPr>
+          <a:xfrm>
+            <a:off x="548640" y="502920"/>
+            <a:ext cx="502920" cy="502920"/>
+          </a:xfrm>
+          <a:prstGeom prst="rect">
+            <a:avLst/>
+          </a:prstGeom>
+          <a:noFill/>
+        </p:spPr>
+        <p:txBody>
+          <a:bodyPr wrap="square">
+            <a:spAutoFit/>
+          </a:bodyPr>
+          <a:lstStyle/>
+          <a:p>
+            <a:pPr algn="ctr"/>
+            <a:r>
+              <a:rPr sz="2000" b="0">
+                <a:solidFill>
+                  <a:srgbClr val="0A1F33"/>
+                </a:solidFill>
+                <a:latin typeface="Calibri"/>
+              </a:rPr>
+              <a:t>?</a:t>
+            </a:r>
+          </a:p>
+        </p:txBody>
+      </p:sp>
+      <p:sp>
+        <p:nvSpPr>
+          <p:cNvPr id="4" name="TextBox 3"/>
+          <p:cNvSpPr txBox="1"/>
+          <p:nvPr/>
+        </p:nvSpPr>
+        <p:spPr>
+          <a:xfrm>
+            <a:off x="1234440" y="530352"/>
+            <a:ext cx="9144000" cy="457200"/>
+          </a:xfrm>
+          <a:prstGeom prst="rect">
+            <a:avLst/>
+          </a:prstGeom>
+          <a:noFill/>
+        </p:spPr>
+        <p:txBody>
+          <a:bodyPr wrap="square">
+            <a:spAutoFit/>
+          </a:bodyPr>
+          <a:lstStyle/>
+          <a:p>
+            <a:r>
+              <a:rPr sz="1400" b="1">
+                <a:solidFill>
+                  <a:srgbClr val="DE911D"/>
+                </a:solidFill>
+                <a:latin typeface="Calibri"/>
+              </a:rPr>
+              <a:t>CASO 2 · ¿QUÉ DECIDE LA PERSONA ÁRBITRA?</a:t>
+            </a:r>
+          </a:p>
+        </p:txBody>
+      </p:sp>
+      <p:sp>
+        <p:nvSpPr>
+          <p:cNvPr id="5" name="TextBox 4"/>
+          <p:cNvSpPr txBox="1"/>
+          <p:nvPr/>
+        </p:nvSpPr>
+        <p:spPr>
+          <a:xfrm>
+            <a:off x="548640" y="1051560"/>
+            <a:ext cx="11064240" cy="822960"/>
+          </a:xfrm>
+          <a:prstGeom prst="rect">
+            <a:avLst/>
+          </a:prstGeom>
+          <a:noFill/>
+        </p:spPr>
+        <p:txBody>
+          <a:bodyPr wrap="square">
+            <a:spAutoFit/>
+          </a:bodyPr>
+          <a:lstStyle/>
+          <a:p>
+            <a:r>
+              <a:rPr sz="2600" b="1">
+                <a:solidFill>
+                  <a:srgbClr val="0A1F33"/>
+                </a:solidFill>
+                <a:latin typeface="Cambria"/>
+              </a:rPr>
+              <a:t>El error del emparejamiento publicado</a:t>
+            </a:r>
+          </a:p>
+        </p:txBody>
+      </p:sp>
+      <p:sp>
+        <p:nvSpPr>
+          <p:cNvPr id="6" name="Rectangle 5"/>
+          <p:cNvSpPr/>
+          <p:nvPr/>
+        </p:nvSpPr>
+        <p:spPr>
+          <a:xfrm>
+            <a:off x="548640" y="1965960"/>
+            <a:ext cx="11064240" cy="4206240"/>
+          </a:xfrm>
+          <a:prstGeom prst="rect">
+            <a:avLst/>
+          </a:prstGeom>
+          <a:solidFill>
+            <a:srgbClr val="F0F4F8"/>
+          </a:solidFill>
+          <a:ln>
+            <a:noFill/>
+          </a:ln>
+          <a:effectLst/>
+        </p:spPr>
+        <p:style>
+          <a:lnRef idx="1">
+            <a:schemeClr val="accent1"/>
+          </a:lnRef>
+          <a:fillRef idx="3">
+            <a:schemeClr val="accent1"/>
+          </a:fillRef>
+          <a:effectRef idx="2">
+            <a:schemeClr val="accent1"/>
+          </a:effectRef>
+          <a:fontRef idx="minor">
+            <a:schemeClr val="lt1"/>
+          </a:fontRef>
+        </p:style>
+        <p:txBody>
+          <a:bodyPr rtlCol="0" anchor="ctr"/>
+          <a:lstStyle/>
+          <a:p>
+            <a:pPr algn="ctr"/>
+          </a:p>
+        </p:txBody>
+      </p:sp>
+      <p:sp>
+        <p:nvSpPr>
+          <p:cNvPr id="7" name="TextBox 6"/>
+          <p:cNvSpPr txBox="1"/>
+          <p:nvPr/>
+        </p:nvSpPr>
+        <p:spPr>
+          <a:xfrm>
+            <a:off x="914400" y="2240280"/>
+            <a:ext cx="10332720" cy="3749039"/>
+          </a:xfrm>
+          <a:prstGeom prst="rect">
+            <a:avLst/>
+          </a:prstGeom>
+          <a:noFill/>
+        </p:spPr>
+        <p:txBody>
+          <a:bodyPr wrap="square">
+            <a:spAutoFit/>
+          </a:bodyPr>
+          <a:lstStyle/>
+          <a:p>
+            <a:r>
+              <a:rPr sz="2000" b="0">
+                <a:solidFill>
+                  <a:srgbClr val="334E68"/>
+                </a:solidFill>
+                <a:latin typeface="Calibri"/>
+              </a:rPr>
+              <a:t>Tras publicar la ronda 4, un padre de familia pide cambiar un emparejamiento porque su hijo «ya jugó con alguien de su colegio».</a:t>
+            </a:r>
+          </a:p>
+        </p:txBody>
+      </p:sp>
+    </p:spTree>
+  </p:cSld>
+  <p:clrMapOvr>
+    <a:masterClrMapping/>
+  </p:clrMapOvr>
+</p:sld>
+</file>
+
+<file path=ppt/slides/slide12.xml><?xml version="1.0" encoding="utf-8"?>
+<p:sld xmlns:a="http://schemas.openxmlformats.org/drawingml/2006/main" xmlns:p="http://schemas.openxmlformats.org/presentationml/2006/main" xmlns:r="http://schemas.openxmlformats.org/officeDocument/2006/relationships">
+  <p:cSld>
+    <p:spTree>
+      <p:nvGrpSpPr>
+        <p:cNvPr id="1" name=""/>
+        <p:cNvGrpSpPr/>
+        <p:nvPr/>
+      </p:nvGrpSpPr>
+      <p:grpSpPr/>
+      <p:sp>
+        <p:nvSpPr>
+          <p:cNvPr id="2" name="Rectangle 1"/>
+          <p:cNvSpPr/>
+          <p:nvPr/>
+        </p:nvSpPr>
+        <p:spPr>
+          <a:xfrm>
+            <a:off x="0" y="0"/>
+            <a:ext cx="12191695" cy="6858000"/>
+          </a:xfrm>
+          <a:prstGeom prst="rect">
+            <a:avLst/>
+          </a:prstGeom>
+          <a:solidFill>
+            <a:srgbClr val="102A43"/>
+          </a:solidFill>
+          <a:ln>
+            <a:noFill/>
+          </a:ln>
+          <a:effectLst/>
+        </p:spPr>
+        <p:style>
+          <a:lnRef idx="1">
+            <a:schemeClr val="accent1"/>
+          </a:lnRef>
+          <a:fillRef idx="3">
+            <a:schemeClr val="accent1"/>
+          </a:fillRef>
+          <a:effectRef idx="2">
+            <a:schemeClr val="accent1"/>
+          </a:effectRef>
+          <a:fontRef idx="minor">
+            <a:schemeClr val="lt1"/>
+          </a:fontRef>
+        </p:style>
+        <p:txBody>
+          <a:bodyPr rtlCol="0" anchor="ctr"/>
+          <a:lstStyle/>
+          <a:p>
+            <a:pPr algn="ctr"/>
+          </a:p>
+        </p:txBody>
+      </p:sp>
+      <p:sp>
+        <p:nvSpPr>
+          <p:cNvPr id="3" name="TextBox 2"/>
+          <p:cNvSpPr txBox="1"/>
+          <p:nvPr/>
+        </p:nvSpPr>
+        <p:spPr>
+          <a:xfrm>
+            <a:off x="548640" y="548640"/>
+            <a:ext cx="11064240" cy="457200"/>
+          </a:xfrm>
+          <a:prstGeom prst="rect">
+            <a:avLst/>
+          </a:prstGeom>
+          <a:noFill/>
+        </p:spPr>
+        <p:txBody>
+          <a:bodyPr wrap="square">
+            <a:spAutoFit/>
+          </a:bodyPr>
+          <a:lstStyle/>
+          <a:p>
+            <a:r>
+              <a:rPr sz="1400" b="1">
+                <a:solidFill>
+                  <a:srgbClr val="F0B429"/>
+                </a:solidFill>
+                <a:latin typeface="Calibri"/>
+              </a:rPr>
+              <a:t>CASO 2 · DECISIÓN</a:t>
+            </a:r>
+          </a:p>
+        </p:txBody>
+      </p:sp>
+      <p:sp>
+        <p:nvSpPr>
+          <p:cNvPr id="4" name="TextBox 3"/>
+          <p:cNvSpPr txBox="1"/>
+          <p:nvPr/>
+        </p:nvSpPr>
+        <p:spPr>
+          <a:xfrm>
+            <a:off x="548640" y="1051560"/>
+            <a:ext cx="11064240" cy="822960"/>
+          </a:xfrm>
+          <a:prstGeom prst="rect">
+            <a:avLst/>
+          </a:prstGeom>
+          <a:noFill/>
+        </p:spPr>
+        <p:txBody>
+          <a:bodyPr wrap="square">
+            <a:spAutoFit/>
+          </a:bodyPr>
+          <a:lstStyle/>
+          <a:p>
+            <a:r>
+              <a:rPr sz="2600" b="1">
+                <a:solidFill>
+                  <a:srgbClr val="FFFFFF"/>
+                </a:solidFill>
+                <a:latin typeface="Cambria"/>
+              </a:rPr>
+              <a:t>El error del emparejamiento publicado</a:t>
+            </a:r>
+          </a:p>
+        </p:txBody>
+      </p:sp>
+      <p:sp>
+        <p:nvSpPr>
+          <p:cNvPr id="5" name="TextBox 4"/>
+          <p:cNvSpPr txBox="1"/>
+          <p:nvPr/>
+        </p:nvSpPr>
+        <p:spPr>
+          <a:xfrm>
+            <a:off x="548640" y="2103120"/>
+            <a:ext cx="11064240" cy="3931920"/>
+          </a:xfrm>
+          <a:prstGeom prst="rect">
+            <a:avLst/>
+          </a:prstGeom>
+          <a:noFill/>
+        </p:spPr>
+        <p:txBody>
+          <a:bodyPr wrap="square">
+            <a:spAutoFit/>
+          </a:bodyPr>
+          <a:lstStyle/>
+          <a:p>
+            <a:r>
+              <a:rPr sz="2000" b="0">
+                <a:solidFill>
+                  <a:srgbClr val="CADCFC"/>
+                </a:solidFill>
+                <a:latin typeface="Calibri"/>
+              </a:rPr>
+              <a:t>No se cambia: jugar con alguien del mismo centro educativo no es una causa. Solo se corrige si el emparejamiento hace jugar dos veces a los mismos dos jugadores (salvo que la normativa del evento prevea evitar cruces del mismo centro, y en ese caso debe estar anunciado).</a:t>
+            </a:r>
+          </a:p>
+        </p:txBody>
+      </p:sp>
+      <p:sp>
+        <p:nvSpPr>
+          <p:cNvPr id="6" name="TextBox 5"/>
+          <p:cNvSpPr txBox="1"/>
+          <p:nvPr/>
+        </p:nvSpPr>
+        <p:spPr>
+          <a:xfrm>
+            <a:off x="548640" y="6263640"/>
+            <a:ext cx="11064240" cy="365760"/>
+          </a:xfrm>
+          <a:prstGeom prst="rect">
+            <a:avLst/>
+          </a:prstGeom>
+          <a:noFill/>
+        </p:spPr>
+        <p:txBody>
+          <a:bodyPr wrap="square">
+            <a:spAutoFit/>
+          </a:bodyPr>
+          <a:lstStyle/>
+          <a:p>
+            <a:r>
+              <a:rPr sz="1100" b="0">
+                <a:solidFill>
+                  <a:srgbClr val="9FB3C8"/>
+                </a:solidFill>
+                <a:latin typeface="Calibri"/>
+              </a:rPr>
+              <a:t>Fuente: Reglas generales de manejo del sistema suizo (Handbook C.04.2)</a:t>
+            </a:r>
+          </a:p>
+        </p:txBody>
+      </p:sp>
+    </p:spTree>
+  </p:cSld>
+  <p:clrMapOvr>
+    <a:masterClrMapping/>
+  </p:clrMapOvr>
+</p:sld>
+</file>
+
+<file path=ppt/slides/slide13.xml><?xml version="1.0" encoding="utf-8"?>
+<p:sld xmlns:a="http://schemas.openxmlformats.org/drawingml/2006/main" xmlns:p="http://schemas.openxmlformats.org/presentationml/2006/main" xmlns:r="http://schemas.openxmlformats.org/officeDocument/2006/relationships">
+  <p:cSld>
+    <p:spTree>
+      <p:nvGrpSpPr>
+        <p:cNvPr id="1" name=""/>
+        <p:cNvGrpSpPr/>
+        <p:nvPr/>
+      </p:nvGrpSpPr>
+      <p:grpSpPr/>
+      <p:sp>
+        <p:nvSpPr>
+          <p:cNvPr id="2" name="Oval 1"/>
+          <p:cNvSpPr/>
+          <p:nvPr/>
+        </p:nvSpPr>
+        <p:spPr>
+          <a:xfrm>
+            <a:off x="548640" y="502920"/>
+            <a:ext cx="502920" cy="502920"/>
+          </a:xfrm>
+          <a:prstGeom prst="ellipse">
+            <a:avLst/>
+          </a:prstGeom>
+          <a:solidFill>
+            <a:srgbClr val="DE911D"/>
+          </a:solidFill>
+          <a:ln>
+            <a:noFill/>
+          </a:ln>
+          <a:effectLst/>
+        </p:spPr>
+        <p:style>
+          <a:lnRef idx="1">
+            <a:schemeClr val="accent1"/>
+          </a:lnRef>
+          <a:fillRef idx="3">
+            <a:schemeClr val="accent1"/>
+          </a:fillRef>
+          <a:effectRef idx="2">
+            <a:schemeClr val="accent1"/>
+          </a:effectRef>
+          <a:fontRef idx="minor">
+            <a:schemeClr val="lt1"/>
+          </a:fontRef>
+        </p:style>
+        <p:txBody>
+          <a:bodyPr rtlCol="0" anchor="ctr"/>
+          <a:lstStyle/>
+          <a:p>
+            <a:pPr algn="ctr"/>
+          </a:p>
+        </p:txBody>
+      </p:sp>
+      <p:sp>
+        <p:nvSpPr>
+          <p:cNvPr id="3" name="TextBox 2"/>
+          <p:cNvSpPr txBox="1"/>
+          <p:nvPr/>
+        </p:nvSpPr>
+        <p:spPr>
+          <a:xfrm>
+            <a:off x="548640" y="502920"/>
+            <a:ext cx="502920" cy="502920"/>
+          </a:xfrm>
+          <a:prstGeom prst="rect">
+            <a:avLst/>
+          </a:prstGeom>
+          <a:noFill/>
+        </p:spPr>
+        <p:txBody>
+          <a:bodyPr wrap="square">
+            <a:spAutoFit/>
+          </a:bodyPr>
+          <a:lstStyle/>
+          <a:p>
+            <a:pPr algn="ctr"/>
+            <a:r>
+              <a:rPr sz="2000" b="0">
+                <a:solidFill>
+                  <a:srgbClr val="0A1F33"/>
+                </a:solidFill>
+                <a:latin typeface="Calibri"/>
+              </a:rPr>
+              <a:t>?</a:t>
+            </a:r>
+          </a:p>
+        </p:txBody>
+      </p:sp>
+      <p:sp>
+        <p:nvSpPr>
+          <p:cNvPr id="4" name="TextBox 3"/>
+          <p:cNvSpPr txBox="1"/>
+          <p:nvPr/>
+        </p:nvSpPr>
+        <p:spPr>
+          <a:xfrm>
+            <a:off x="1234440" y="530352"/>
+            <a:ext cx="9144000" cy="457200"/>
+          </a:xfrm>
+          <a:prstGeom prst="rect">
+            <a:avLst/>
+          </a:prstGeom>
+          <a:noFill/>
+        </p:spPr>
+        <p:txBody>
+          <a:bodyPr wrap="square">
+            <a:spAutoFit/>
+          </a:bodyPr>
+          <a:lstStyle/>
+          <a:p>
+            <a:r>
+              <a:rPr sz="1400" b="1">
+                <a:solidFill>
+                  <a:srgbClr val="DE911D"/>
+                </a:solidFill>
+                <a:latin typeface="Calibri"/>
+              </a:rPr>
+              <a:t>CASO 3 · ¿QUÉ DECIDE LA PERSONA ÁRBITRA?</a:t>
+            </a:r>
+          </a:p>
+        </p:txBody>
+      </p:sp>
+      <p:sp>
+        <p:nvSpPr>
+          <p:cNvPr id="5" name="TextBox 4"/>
+          <p:cNvSpPr txBox="1"/>
+          <p:nvPr/>
+        </p:nvSpPr>
+        <p:spPr>
+          <a:xfrm>
+            <a:off x="548640" y="1051560"/>
+            <a:ext cx="11064240" cy="822960"/>
+          </a:xfrm>
+          <a:prstGeom prst="rect">
+            <a:avLst/>
+          </a:prstGeom>
+          <a:noFill/>
+        </p:spPr>
+        <p:txBody>
+          <a:bodyPr wrap="square">
+            <a:spAutoFit/>
+          </a:bodyPr>
+          <a:lstStyle/>
+          <a:p>
+            <a:r>
+              <a:rPr sz="2600" b="1">
+                <a:solidFill>
+                  <a:srgbClr val="0A1F33"/>
+                </a:solidFill>
+                <a:latin typeface="Cambria"/>
+              </a:rPr>
+              <a:t>Siete jugadores en round robin</a:t>
+            </a:r>
+          </a:p>
+        </p:txBody>
+      </p:sp>
+      <p:sp>
+        <p:nvSpPr>
+          <p:cNvPr id="6" name="Rectangle 5"/>
+          <p:cNvSpPr/>
+          <p:nvPr/>
+        </p:nvSpPr>
+        <p:spPr>
+          <a:xfrm>
+            <a:off x="548640" y="1965960"/>
+            <a:ext cx="11064240" cy="4206240"/>
+          </a:xfrm>
+          <a:prstGeom prst="rect">
+            <a:avLst/>
+          </a:prstGeom>
+          <a:solidFill>
+            <a:srgbClr val="F0F4F8"/>
+          </a:solidFill>
+          <a:ln>
+            <a:noFill/>
+          </a:ln>
+          <a:effectLst/>
+        </p:spPr>
+        <p:style>
+          <a:lnRef idx="1">
+            <a:schemeClr val="accent1"/>
+          </a:lnRef>
+          <a:fillRef idx="3">
+            <a:schemeClr val="accent1"/>
+          </a:fillRef>
+          <a:effectRef idx="2">
+            <a:schemeClr val="accent1"/>
+          </a:effectRef>
+          <a:fontRef idx="minor">
+            <a:schemeClr val="lt1"/>
+          </a:fontRef>
+        </p:style>
+        <p:txBody>
+          <a:bodyPr rtlCol="0" anchor="ctr"/>
+          <a:lstStyle/>
+          <a:p>
+            <a:pPr algn="ctr"/>
+          </a:p>
+        </p:txBody>
+      </p:sp>
+      <p:sp>
+        <p:nvSpPr>
+          <p:cNvPr id="7" name="TextBox 6"/>
+          <p:cNvSpPr txBox="1"/>
+          <p:nvPr/>
+        </p:nvSpPr>
+        <p:spPr>
+          <a:xfrm>
+            <a:off x="914400" y="2240280"/>
+            <a:ext cx="10332720" cy="3749039"/>
+          </a:xfrm>
+          <a:prstGeom prst="rect">
+            <a:avLst/>
+          </a:prstGeom>
+          <a:noFill/>
+        </p:spPr>
+        <p:txBody>
+          <a:bodyPr wrap="square">
+            <a:spAutoFit/>
+          </a:bodyPr>
+          <a:lstStyle/>
+          <a:p>
+            <a:r>
+              <a:rPr sz="2000" b="0">
+                <a:solidFill>
+                  <a:srgbClr val="334E68"/>
+                </a:solidFill>
+                <a:latin typeface="Calibri"/>
+              </a:rPr>
+              <a:t>Se inscriben 7 estudiantes y se quiere un todos contra todos.</a:t>
+            </a:r>
+          </a:p>
+        </p:txBody>
+      </p:sp>
+    </p:spTree>
+  </p:cSld>
+  <p:clrMapOvr>
+    <a:masterClrMapping/>
+  </p:clrMapOvr>
+</p:sld>
+</file>
+
+<file path=ppt/slides/slide14.xml><?xml version="1.0" encoding="utf-8"?>
+<p:sld xmlns:a="http://schemas.openxmlformats.org/drawingml/2006/main" xmlns:p="http://schemas.openxmlformats.org/presentationml/2006/main" xmlns:r="http://schemas.openxmlformats.org/officeDocument/2006/relationships">
+  <p:cSld>
+    <p:spTree>
+      <p:nvGrpSpPr>
+        <p:cNvPr id="1" name=""/>
+        <p:cNvGrpSpPr/>
+        <p:nvPr/>
+      </p:nvGrpSpPr>
+      <p:grpSpPr/>
+      <p:sp>
+        <p:nvSpPr>
+          <p:cNvPr id="2" name="Rectangle 1"/>
+          <p:cNvSpPr/>
+          <p:nvPr/>
+        </p:nvSpPr>
+        <p:spPr>
+          <a:xfrm>
+            <a:off x="0" y="0"/>
+            <a:ext cx="12191695" cy="6858000"/>
+          </a:xfrm>
+          <a:prstGeom prst="rect">
+            <a:avLst/>
+          </a:prstGeom>
+          <a:solidFill>
+            <a:srgbClr val="102A43"/>
+          </a:solidFill>
+          <a:ln>
+            <a:noFill/>
+          </a:ln>
+          <a:effectLst/>
+        </p:spPr>
+        <p:style>
+          <a:lnRef idx="1">
+            <a:schemeClr val="accent1"/>
+          </a:lnRef>
+          <a:fillRef idx="3">
+            <a:schemeClr val="accent1"/>
+          </a:fillRef>
+          <a:effectRef idx="2">
+            <a:schemeClr val="accent1"/>
+          </a:effectRef>
+          <a:fontRef idx="minor">
+            <a:schemeClr val="lt1"/>
+          </a:fontRef>
+        </p:style>
+        <p:txBody>
+          <a:bodyPr rtlCol="0" anchor="ctr"/>
+          <a:lstStyle/>
+          <a:p>
+            <a:pPr algn="ctr"/>
+          </a:p>
+        </p:txBody>
+      </p:sp>
+      <p:sp>
+        <p:nvSpPr>
+          <p:cNvPr id="3" name="TextBox 2"/>
+          <p:cNvSpPr txBox="1"/>
+          <p:nvPr/>
+        </p:nvSpPr>
+        <p:spPr>
+          <a:xfrm>
+            <a:off x="548640" y="548640"/>
+            <a:ext cx="11064240" cy="457200"/>
+          </a:xfrm>
+          <a:prstGeom prst="rect">
+            <a:avLst/>
+          </a:prstGeom>
+          <a:noFill/>
+        </p:spPr>
+        <p:txBody>
+          <a:bodyPr wrap="square">
+            <a:spAutoFit/>
+          </a:bodyPr>
+          <a:lstStyle/>
+          <a:p>
+            <a:r>
+              <a:rPr sz="1400" b="1">
+                <a:solidFill>
+                  <a:srgbClr val="F0B429"/>
+                </a:solidFill>
+                <a:latin typeface="Calibri"/>
+              </a:rPr>
+              <a:t>CASO 3 · DECISIÓN</a:t>
+            </a:r>
+          </a:p>
+        </p:txBody>
+      </p:sp>
+      <p:sp>
+        <p:nvSpPr>
+          <p:cNvPr id="4" name="TextBox 3"/>
+          <p:cNvSpPr txBox="1"/>
+          <p:nvPr/>
+        </p:nvSpPr>
+        <p:spPr>
+          <a:xfrm>
+            <a:off x="548640" y="1051560"/>
+            <a:ext cx="11064240" cy="822960"/>
+          </a:xfrm>
+          <a:prstGeom prst="rect">
+            <a:avLst/>
+          </a:prstGeom>
+          <a:noFill/>
+        </p:spPr>
+        <p:txBody>
+          <a:bodyPr wrap="square">
+            <a:spAutoFit/>
+          </a:bodyPr>
+          <a:lstStyle/>
+          <a:p>
+            <a:r>
+              <a:rPr sz="2600" b="1">
+                <a:solidFill>
+                  <a:srgbClr val="FFFFFF"/>
+                </a:solidFill>
+                <a:latin typeface="Cambria"/>
+              </a:rPr>
+              <a:t>Siete jugadores en round robin</a:t>
+            </a:r>
+          </a:p>
+        </p:txBody>
+      </p:sp>
+      <p:sp>
+        <p:nvSpPr>
+          <p:cNvPr id="5" name="TextBox 4"/>
+          <p:cNvSpPr txBox="1"/>
+          <p:nvPr/>
+        </p:nvSpPr>
+        <p:spPr>
+          <a:xfrm>
+            <a:off x="548640" y="2103120"/>
+            <a:ext cx="11064240" cy="3931920"/>
+          </a:xfrm>
+          <a:prstGeom prst="rect">
+            <a:avLst/>
+          </a:prstGeom>
+          <a:noFill/>
+        </p:spPr>
+        <p:txBody>
+          <a:bodyPr wrap="square">
+            <a:spAutoFit/>
+          </a:bodyPr>
+          <a:lstStyle/>
+          <a:p>
+            <a:r>
+              <a:rPr sz="2000" b="0">
+                <a:solidFill>
+                  <a:srgbClr val="CADCFC"/>
+                </a:solidFill>
+                <a:latin typeface="Calibri"/>
+              </a:rPr>
+              <a:t>Se agrega un descanso como octavo número: 7 rondas, 21 partidas, y en cada ronda descansa un jugador.</a:t>
+            </a:r>
+          </a:p>
+        </p:txBody>
+      </p:sp>
+      <p:sp>
+        <p:nvSpPr>
+          <p:cNvPr id="6" name="TextBox 5"/>
+          <p:cNvSpPr txBox="1"/>
+          <p:nvPr/>
+        </p:nvSpPr>
+        <p:spPr>
+          <a:xfrm>
+            <a:off x="548640" y="6263640"/>
+            <a:ext cx="11064240" cy="365760"/>
+          </a:xfrm>
+          <a:prstGeom prst="rect">
+            <a:avLst/>
+          </a:prstGeom>
+          <a:noFill/>
+        </p:spPr>
+        <p:txBody>
+          <a:bodyPr wrap="square">
+            <a:spAutoFit/>
+          </a:bodyPr>
+          <a:lstStyle/>
+          <a:p>
+            <a:r>
+              <a:rPr sz="1100" b="0">
+                <a:solidFill>
+                  <a:srgbClr val="9FB3C8"/>
+                </a:solidFill>
+                <a:latin typeface="Calibri"/>
+              </a:rPr>
+              <a:t>Fuente: Tablas de Berger</a:t>
+            </a:r>
+          </a:p>
+        </p:txBody>
+      </p:sp>
+    </p:spTree>
+  </p:cSld>
+  <p:clrMapOvr>
+    <a:masterClrMapping/>
+  </p:clrMapOvr>
+</p:sld>
+</file>
+
+<file path=ppt/slides/slide15.xml><?xml version="1.0" encoding="utf-8"?>
+<p:sld xmlns:a="http://schemas.openxmlformats.org/drawingml/2006/main" xmlns:p="http://schemas.openxmlformats.org/presentationml/2006/main" xmlns:r="http://schemas.openxmlformats.org/officeDocument/2006/relationships">
+  <p:cSld>
+    <p:spTree>
+      <p:nvGrpSpPr>
+        <p:cNvPr id="1" name=""/>
+        <p:cNvGrpSpPr/>
+        <p:nvPr/>
+      </p:nvGrpSpPr>
+      <p:grpSpPr/>
+      <p:sp>
+        <p:nvSpPr>
+          <p:cNvPr id="2" name="Rectangle 1"/>
+          <p:cNvSpPr/>
+          <p:nvPr/>
+        </p:nvSpPr>
+        <p:spPr>
+          <a:xfrm>
+            <a:off x="0" y="0"/>
+            <a:ext cx="12191695" cy="6858000"/>
+          </a:xfrm>
+          <a:prstGeom prst="rect">
+            <a:avLst/>
+          </a:prstGeom>
+          <a:solidFill>
+            <a:srgbClr val="102A43"/>
+          </a:solidFill>
+          <a:ln>
+            <a:noFill/>
+          </a:ln>
+          <a:effectLst/>
+        </p:spPr>
+        <p:style>
+          <a:lnRef idx="1">
+            <a:schemeClr val="accent1"/>
+          </a:lnRef>
+          <a:fillRef idx="3">
+            <a:schemeClr val="accent1"/>
+          </a:fillRef>
+          <a:effectRef idx="2">
+            <a:schemeClr val="accent1"/>
+          </a:effectRef>
+          <a:fontRef idx="minor">
+            <a:schemeClr val="lt1"/>
+          </a:fontRef>
+        </p:style>
+        <p:txBody>
+          <a:bodyPr rtlCol="0" anchor="ctr"/>
+          <a:lstStyle/>
+          <a:p>
+            <a:pPr algn="ctr"/>
+          </a:p>
+        </p:txBody>
+      </p:sp>
+      <p:sp>
+        <p:nvSpPr>
+          <p:cNvPr id="3" name="Oval 2"/>
+          <p:cNvSpPr/>
+          <p:nvPr/>
+        </p:nvSpPr>
+        <p:spPr>
+          <a:xfrm>
+            <a:off x="-1280160" y="-1463040"/>
+            <a:ext cx="4114800" cy="4114800"/>
+          </a:xfrm>
+          <a:prstGeom prst="ellipse">
+            <a:avLst/>
+          </a:prstGeom>
+          <a:solidFill>
+            <a:srgbClr val="0A1F33"/>
+          </a:solidFill>
+          <a:ln>
+            <a:noFill/>
+          </a:ln>
+          <a:effectLst/>
+        </p:spPr>
+        <p:style>
+          <a:lnRef idx="1">
+            <a:schemeClr val="accent1"/>
+          </a:lnRef>
+          <a:fillRef idx="3">
+            <a:schemeClr val="accent1"/>
+          </a:fillRef>
+          <a:effectRef idx="2">
+            <a:schemeClr val="accent1"/>
+          </a:effectRef>
+          <a:fontRef idx="minor">
+            <a:schemeClr val="lt1"/>
+          </a:fontRef>
+        </p:style>
+        <p:txBody>
+          <a:bodyPr rtlCol="0" anchor="ctr"/>
+          <a:lstStyle/>
+          <a:p>
+            <a:pPr algn="ctr"/>
+          </a:p>
+        </p:txBody>
+      </p:sp>
+      <p:sp>
+        <p:nvSpPr>
+          <p:cNvPr id="4" name="Oval 3"/>
+          <p:cNvSpPr/>
+          <p:nvPr/>
+        </p:nvSpPr>
+        <p:spPr>
+          <a:xfrm>
+            <a:off x="5175504" y="822960"/>
+            <a:ext cx="1828800" cy="1828800"/>
+          </a:xfrm>
+          <a:prstGeom prst="ellipse">
+            <a:avLst/>
+          </a:prstGeom>
+          <a:solidFill>
+            <a:srgbClr val="DE911D"/>
+          </a:solidFill>
+          <a:ln>
+            <a:noFill/>
+          </a:ln>
+          <a:effectLst/>
+        </p:spPr>
+        <p:style>
+          <a:lnRef idx="1">
+            <a:schemeClr val="accent1"/>
+          </a:lnRef>
+          <a:fillRef idx="3">
+            <a:schemeClr val="accent1"/>
+          </a:fillRef>
+          <a:effectRef idx="2">
+            <a:schemeClr val="accent1"/>
+          </a:effectRef>
+          <a:fontRef idx="minor">
+            <a:schemeClr val="lt1"/>
+          </a:fontRef>
+        </p:style>
+        <p:txBody>
+          <a:bodyPr rtlCol="0" anchor="ctr"/>
+          <a:lstStyle/>
+          <a:p>
+            <a:pPr algn="ctr"/>
+          </a:p>
+        </p:txBody>
+      </p:sp>
+      <p:sp>
+        <p:nvSpPr>
+          <p:cNvPr id="5" name="TextBox 4"/>
+          <p:cNvSpPr txBox="1"/>
+          <p:nvPr/>
+        </p:nvSpPr>
+        <p:spPr>
+          <a:xfrm>
+            <a:off x="5175504" y="822960"/>
+            <a:ext cx="1828800" cy="1828800"/>
+          </a:xfrm>
+          <a:prstGeom prst="rect">
+            <a:avLst/>
+          </a:prstGeom>
+          <a:noFill/>
+        </p:spPr>
+        <p:txBody>
+          <a:bodyPr wrap="square">
+            <a:spAutoFit/>
+          </a:bodyPr>
+          <a:lstStyle/>
+          <a:p>
+            <a:pPr algn="ctr"/>
+            <a:r>
+              <a:rPr sz="4400" b="1">
+                <a:solidFill>
+                  <a:srgbClr val="0A1F33"/>
+                </a:solidFill>
+                <a:latin typeface="Calibri"/>
+              </a:rPr>
+              <a:t>✔</a:t>
+            </a:r>
+          </a:p>
+        </p:txBody>
+      </p:sp>
+      <p:sp>
+        <p:nvSpPr>
+          <p:cNvPr id="6" name="TextBox 5"/>
+          <p:cNvSpPr txBox="1"/>
+          <p:nvPr/>
+        </p:nvSpPr>
+        <p:spPr>
+          <a:xfrm>
+            <a:off x="548640" y="2880360"/>
+            <a:ext cx="11064240" cy="457200"/>
+          </a:xfrm>
+          <a:prstGeom prst="rect">
+            <a:avLst/>
+          </a:prstGeom>
+          <a:noFill/>
+        </p:spPr>
+        <p:txBody>
+          <a:bodyPr wrap="square">
+            <a:spAutoFit/>
+          </a:bodyPr>
+          <a:lstStyle/>
+          <a:p>
+            <a:pPr algn="ctr"/>
+            <a:r>
+              <a:rPr sz="1400" b="1">
+                <a:solidFill>
+                  <a:srgbClr val="F0B429"/>
+                </a:solidFill>
+                <a:latin typeface="Calibri"/>
+              </a:rPr>
+              <a:t>PRÁCTICA — CONSTRUCCIÓN DE UN CUADRO DE EMPAREJAMIENTO</a:t>
+            </a:r>
+          </a:p>
+        </p:txBody>
+      </p:sp>
+      <p:sp>
+        <p:nvSpPr>
+          <p:cNvPr id="7" name="TextBox 6"/>
+          <p:cNvSpPr txBox="1"/>
+          <p:nvPr/>
+        </p:nvSpPr>
+        <p:spPr>
+          <a:xfrm>
+            <a:off x="1280160" y="3383280"/>
+            <a:ext cx="9601200" cy="2377440"/>
+          </a:xfrm>
+          <a:prstGeom prst="rect">
+            <a:avLst/>
+          </a:prstGeom>
+          <a:noFill/>
+        </p:spPr>
+        <p:txBody>
+          <a:bodyPr wrap="square">
+            <a:spAutoFit/>
+          </a:bodyPr>
+          <a:lstStyle/>
+          <a:p>
+            <a:pPr algn="ctr"/>
+            <a:r>
+              <a:rPr sz="2000" b="0">
+                <a:solidFill>
+                  <a:srgbClr val="FFFFFF"/>
+                </a:solidFill>
+                <a:latin typeface="Cambria"/>
+              </a:rPr>
+              <a:t>Con una lista de 12 jugadores ficticios, cada participante construye la primera ronda bajo sistema suizo y, luego, la calendarización equivalente en round robin.</a:t>
+            </a:r>
+          </a:p>
+        </p:txBody>
+      </p:sp>
+      <p:sp>
+        <p:nvSpPr>
+          <p:cNvPr id="8" name="TextBox 7"/>
+          <p:cNvSpPr txBox="1"/>
+          <p:nvPr/>
+        </p:nvSpPr>
+        <p:spPr>
+          <a:xfrm>
+            <a:off x="548640" y="6263640"/>
+            <a:ext cx="11064240" cy="365760"/>
+          </a:xfrm>
+          <a:prstGeom prst="rect">
+            <a:avLst/>
+          </a:prstGeom>
+          <a:noFill/>
+        </p:spPr>
+        <p:txBody>
+          <a:bodyPr wrap="square">
+            <a:spAutoFit/>
+          </a:bodyPr>
+          <a:lstStyle/>
+          <a:p>
+            <a:pPr algn="ctr"/>
+            <a:r>
+              <a:rPr sz="1200" b="0">
+                <a:solidFill>
+                  <a:srgbClr val="9FB3C8"/>
+                </a:solidFill>
+                <a:latin typeface="Calibri"/>
+              </a:rPr>
+              <a:t>Formación Ajedrez · Sesión 4</a:t>
+            </a:r>
+          </a:p>
+        </p:txBody>
+      </p:sp>
+    </p:spTree>
+  </p:cSld>
+  <p:clrMapOvr>
+    <a:masterClrMapping/>
+  </p:clrMapOvr>
+</p:sld>
+</file>
+
+<file path=ppt/slides/slide16.xml><?xml version="1.0" encoding="utf-8"?>
+<p:sld xmlns:a="http://schemas.openxmlformats.org/drawingml/2006/main" xmlns:p="http://schemas.openxmlformats.org/presentationml/2006/main" xmlns:r="http://schemas.openxmlformats.org/officeDocument/2006/relationships">
+  <p:cSld>
+    <p:spTree>
+      <p:nvGrpSpPr>
+        <p:cNvPr id="1" name=""/>
+        <p:cNvGrpSpPr/>
+        <p:nvPr/>
+      </p:nvGrpSpPr>
+      <p:grpSpPr/>
+      <p:sp>
+        <p:nvSpPr>
+          <p:cNvPr id="2" name="Oval 1"/>
+          <p:cNvSpPr/>
+          <p:nvPr/>
+        </p:nvSpPr>
+        <p:spPr>
+          <a:xfrm>
+            <a:off x="548640" y="502920"/>
+            <a:ext cx="502920" cy="502920"/>
+          </a:xfrm>
+          <a:prstGeom prst="ellipse">
+            <a:avLst/>
+          </a:prstGeom>
+          <a:solidFill>
+            <a:srgbClr val="DE911D"/>
+          </a:solidFill>
+          <a:ln>
+            <a:noFill/>
+          </a:ln>
+          <a:effectLst/>
+        </p:spPr>
+        <p:style>
+          <a:lnRef idx="1">
+            <a:schemeClr val="accent1"/>
+          </a:lnRef>
+          <a:fillRef idx="3">
+            <a:schemeClr val="accent1"/>
+          </a:fillRef>
+          <a:effectRef idx="2">
+            <a:schemeClr val="accent1"/>
+          </a:effectRef>
+          <a:fontRef idx="minor">
+            <a:schemeClr val="lt1"/>
+          </a:fontRef>
+        </p:style>
+        <p:txBody>
+          <a:bodyPr rtlCol="0" anchor="ctr"/>
+          <a:lstStyle/>
+          <a:p>
+            <a:pPr algn="ctr"/>
+          </a:p>
+        </p:txBody>
+      </p:sp>
+      <p:sp>
+        <p:nvSpPr>
+          <p:cNvPr id="3" name="TextBox 2"/>
+          <p:cNvSpPr txBox="1"/>
+          <p:nvPr/>
+        </p:nvSpPr>
+        <p:spPr>
+          <a:xfrm>
+            <a:off x="548640" y="502920"/>
+            <a:ext cx="502920" cy="502920"/>
+          </a:xfrm>
+          <a:prstGeom prst="rect">
+            <a:avLst/>
+          </a:prstGeom>
+          <a:noFill/>
+        </p:spPr>
+        <p:txBody>
+          <a:bodyPr wrap="square">
+            <a:spAutoFit/>
+          </a:bodyPr>
+          <a:lstStyle/>
+          <a:p>
+            <a:pPr algn="ctr"/>
+            <a:r>
+              <a:rPr sz="2000" b="0">
+                <a:solidFill>
+                  <a:srgbClr val="0A1F33"/>
+                </a:solidFill>
+                <a:latin typeface="Calibri"/>
+              </a:rPr>
+              <a:t>✎</a:t>
+            </a:r>
+          </a:p>
+        </p:txBody>
+      </p:sp>
+      <p:sp>
+        <p:nvSpPr>
+          <p:cNvPr id="4" name="TextBox 3"/>
+          <p:cNvSpPr txBox="1"/>
+          <p:nvPr/>
+        </p:nvSpPr>
+        <p:spPr>
+          <a:xfrm>
+            <a:off x="1234440" y="530352"/>
+            <a:ext cx="9144000" cy="457200"/>
+          </a:xfrm>
+          <a:prstGeom prst="rect">
+            <a:avLst/>
+          </a:prstGeom>
+          <a:noFill/>
+        </p:spPr>
+        <p:txBody>
+          <a:bodyPr wrap="square">
+            <a:spAutoFit/>
+          </a:bodyPr>
+          <a:lstStyle/>
+          <a:p>
+            <a:r>
+              <a:rPr sz="1400" b="1">
+                <a:solidFill>
+                  <a:srgbClr val="DE911D"/>
+                </a:solidFill>
+                <a:latin typeface="Calibri"/>
+              </a:rPr>
+              <a:t>EJERCICIO 1 DE 4</a:t>
+            </a:r>
+          </a:p>
+        </p:txBody>
+      </p:sp>
+      <p:sp>
+        <p:nvSpPr>
+          <p:cNvPr id="5" name="Rectangle 4"/>
+          <p:cNvSpPr/>
+          <p:nvPr/>
+        </p:nvSpPr>
+        <p:spPr>
+          <a:xfrm>
+            <a:off x="548640" y="1188720"/>
+            <a:ext cx="11064240" cy="5029200"/>
+          </a:xfrm>
+          <a:prstGeom prst="rect">
+            <a:avLst/>
+          </a:prstGeom>
+          <a:solidFill>
+            <a:srgbClr val="F0F4F8"/>
+          </a:solidFill>
+          <a:ln>
+            <a:noFill/>
+          </a:ln>
+          <a:effectLst/>
+        </p:spPr>
+        <p:style>
+          <a:lnRef idx="1">
+            <a:schemeClr val="accent1"/>
+          </a:lnRef>
+          <a:fillRef idx="3">
+            <a:schemeClr val="accent1"/>
+          </a:fillRef>
+          <a:effectRef idx="2">
+            <a:schemeClr val="accent1"/>
+          </a:effectRef>
+          <a:fontRef idx="minor">
+            <a:schemeClr val="lt1"/>
+          </a:fontRef>
+        </p:style>
+        <p:txBody>
+          <a:bodyPr rtlCol="0" anchor="ctr"/>
+          <a:lstStyle/>
+          <a:p>
+            <a:pPr algn="ctr"/>
+          </a:p>
+        </p:txBody>
+      </p:sp>
+      <p:sp>
+        <p:nvSpPr>
+          <p:cNvPr id="6" name="TextBox 5"/>
+          <p:cNvSpPr txBox="1"/>
+          <p:nvPr/>
+        </p:nvSpPr>
+        <p:spPr>
+          <a:xfrm>
+            <a:off x="914400" y="1554480"/>
+            <a:ext cx="10332720" cy="4480560"/>
+          </a:xfrm>
+          <a:prstGeom prst="rect">
+            <a:avLst/>
+          </a:prstGeom>
+          <a:noFill/>
+        </p:spPr>
+        <p:txBody>
+          <a:bodyPr wrap="square">
+            <a:spAutoFit/>
+          </a:bodyPr>
+          <a:lstStyle/>
+          <a:p>
+            <a:r>
+              <a:rPr sz="2200" b="0">
+                <a:solidFill>
+                  <a:srgbClr val="0A1F33"/>
+                </a:solidFill>
+                <a:latin typeface="Calibri"/>
+              </a:rPr>
+              <a:t>Con 12 jugadores ordenados por rating (1 a 12) y el 1 con blancas por sorteo, escribe la primera ronda del suizo.</a:t>
+            </a:r>
+          </a:p>
+        </p:txBody>
+      </p:sp>
+    </p:spTree>
+  </p:cSld>
+  <p:clrMapOvr>
+    <a:masterClrMapping/>
+  </p:clrMapOvr>
+</p:sld>
+</file>
+
+<file path=ppt/slides/slide17.xml><?xml version="1.0" encoding="utf-8"?>
+<p:sld xmlns:a="http://schemas.openxmlformats.org/drawingml/2006/main" xmlns:p="http://schemas.openxmlformats.org/presentationml/2006/main" xmlns:r="http://schemas.openxmlformats.org/officeDocument/2006/relationships">
+  <p:cSld>
+    <p:spTree>
+      <p:nvGrpSpPr>
+        <p:cNvPr id="1" name=""/>
+        <p:cNvGrpSpPr/>
+        <p:nvPr/>
+      </p:nvGrpSpPr>
+      <p:grpSpPr/>
+      <p:sp>
+        <p:nvSpPr>
+          <p:cNvPr id="2" name="Oval 1"/>
+          <p:cNvSpPr/>
+          <p:nvPr/>
+        </p:nvSpPr>
+        <p:spPr>
+          <a:xfrm>
+            <a:off x="548640" y="502920"/>
+            <a:ext cx="502920" cy="502920"/>
+          </a:xfrm>
+          <a:prstGeom prst="ellipse">
+            <a:avLst/>
+          </a:prstGeom>
+          <a:solidFill>
+            <a:srgbClr val="DE911D"/>
+          </a:solidFill>
+          <a:ln>
+            <a:noFill/>
+          </a:ln>
+          <a:effectLst/>
+        </p:spPr>
+        <p:style>
+          <a:lnRef idx="1">
+            <a:schemeClr val="accent1"/>
+          </a:lnRef>
+          <a:fillRef idx="3">
+            <a:schemeClr val="accent1"/>
+          </a:fillRef>
+          <a:effectRef idx="2">
+            <a:schemeClr val="accent1"/>
+          </a:effectRef>
+          <a:fontRef idx="minor">
+            <a:schemeClr val="lt1"/>
+          </a:fontRef>
+        </p:style>
+        <p:txBody>
+          <a:bodyPr rtlCol="0" anchor="ctr"/>
+          <a:lstStyle/>
+          <a:p>
+            <a:pPr algn="ctr"/>
+          </a:p>
+        </p:txBody>
+      </p:sp>
+      <p:sp>
+        <p:nvSpPr>
+          <p:cNvPr id="3" name="TextBox 2"/>
+          <p:cNvSpPr txBox="1"/>
+          <p:nvPr/>
+        </p:nvSpPr>
+        <p:spPr>
+          <a:xfrm>
+            <a:off x="548640" y="502920"/>
+            <a:ext cx="502920" cy="502920"/>
+          </a:xfrm>
+          <a:prstGeom prst="rect">
+            <a:avLst/>
+          </a:prstGeom>
+          <a:noFill/>
+        </p:spPr>
+        <p:txBody>
+          <a:bodyPr wrap="square">
+            <a:spAutoFit/>
+          </a:bodyPr>
+          <a:lstStyle/>
+          <a:p>
+            <a:pPr algn="ctr"/>
+            <a:r>
+              <a:rPr sz="2000" b="0">
+                <a:solidFill>
+                  <a:srgbClr val="0A1F33"/>
+                </a:solidFill>
+                <a:latin typeface="Calibri"/>
+              </a:rPr>
+              <a:t>✎</a:t>
+            </a:r>
+          </a:p>
+        </p:txBody>
+      </p:sp>
+      <p:sp>
+        <p:nvSpPr>
+          <p:cNvPr id="4" name="TextBox 3"/>
+          <p:cNvSpPr txBox="1"/>
+          <p:nvPr/>
+        </p:nvSpPr>
+        <p:spPr>
+          <a:xfrm>
+            <a:off x="1234440" y="530352"/>
+            <a:ext cx="9144000" cy="457200"/>
+          </a:xfrm>
+          <a:prstGeom prst="rect">
+            <a:avLst/>
+          </a:prstGeom>
+          <a:noFill/>
+        </p:spPr>
+        <p:txBody>
+          <a:bodyPr wrap="square">
+            <a:spAutoFit/>
+          </a:bodyPr>
+          <a:lstStyle/>
+          <a:p>
+            <a:r>
+              <a:rPr sz="1400" b="1">
+                <a:solidFill>
+                  <a:srgbClr val="DE911D"/>
+                </a:solidFill>
+                <a:latin typeface="Calibri"/>
+              </a:rPr>
+              <a:t>EJERCICIO 2 DE 4</a:t>
+            </a:r>
+          </a:p>
+        </p:txBody>
+      </p:sp>
+      <p:sp>
+        <p:nvSpPr>
+          <p:cNvPr id="5" name="Rectangle 4"/>
+          <p:cNvSpPr/>
+          <p:nvPr/>
+        </p:nvSpPr>
+        <p:spPr>
+          <a:xfrm>
+            <a:off x="548640" y="1188720"/>
+            <a:ext cx="11064240" cy="5029200"/>
+          </a:xfrm>
+          <a:prstGeom prst="rect">
+            <a:avLst/>
+          </a:prstGeom>
+          <a:solidFill>
+            <a:srgbClr val="F0F4F8"/>
+          </a:solidFill>
+          <a:ln>
+            <a:noFill/>
+          </a:ln>
+          <a:effectLst/>
+        </p:spPr>
+        <p:style>
+          <a:lnRef idx="1">
+            <a:schemeClr val="accent1"/>
+          </a:lnRef>
+          <a:fillRef idx="3">
+            <a:schemeClr val="accent1"/>
+          </a:fillRef>
+          <a:effectRef idx="2">
+            <a:schemeClr val="accent1"/>
+          </a:effectRef>
+          <a:fontRef idx="minor">
+            <a:schemeClr val="lt1"/>
+          </a:fontRef>
+        </p:style>
+        <p:txBody>
+          <a:bodyPr rtlCol="0" anchor="ctr"/>
+          <a:lstStyle/>
+          <a:p>
+            <a:pPr algn="ctr"/>
+          </a:p>
+        </p:txBody>
+      </p:sp>
+      <p:sp>
+        <p:nvSpPr>
+          <p:cNvPr id="6" name="TextBox 5"/>
+          <p:cNvSpPr txBox="1"/>
+          <p:nvPr/>
+        </p:nvSpPr>
+        <p:spPr>
+          <a:xfrm>
+            <a:off x="914400" y="1554480"/>
+            <a:ext cx="10332720" cy="4480560"/>
+          </a:xfrm>
+          <a:prstGeom prst="rect">
+            <a:avLst/>
+          </a:prstGeom>
+          <a:noFill/>
+        </p:spPr>
+        <p:txBody>
+          <a:bodyPr wrap="square">
+            <a:spAutoFit/>
+          </a:bodyPr>
+          <a:lstStyle/>
+          <a:p>
+            <a:r>
+              <a:rPr sz="2200" b="0">
+                <a:solidFill>
+                  <a:srgbClr val="0A1F33"/>
+                </a:solidFill>
+                <a:latin typeface="Calibri"/>
+              </a:rPr>
+              <a:t>¿Cuántas rondas y cuántas partidas tiene un todos contra todos con 10 jugadores? ¿Y con 9?</a:t>
+            </a:r>
+          </a:p>
+        </p:txBody>
+      </p:sp>
+    </p:spTree>
+  </p:cSld>
+  <p:clrMapOvr>
+    <a:masterClrMapping/>
+  </p:clrMapOvr>
+</p:sld>
+</file>
+
+<file path=ppt/slides/slide18.xml><?xml version="1.0" encoding="utf-8"?>
+<p:sld xmlns:a="http://schemas.openxmlformats.org/drawingml/2006/main" xmlns:p="http://schemas.openxmlformats.org/presentationml/2006/main" xmlns:r="http://schemas.openxmlformats.org/officeDocument/2006/relationships">
+  <p:cSld>
+    <p:spTree>
+      <p:nvGrpSpPr>
+        <p:cNvPr id="1" name=""/>
+        <p:cNvGrpSpPr/>
+        <p:nvPr/>
+      </p:nvGrpSpPr>
+      <p:grpSpPr/>
+      <p:sp>
+        <p:nvSpPr>
+          <p:cNvPr id="2" name="Oval 1"/>
+          <p:cNvSpPr/>
+          <p:nvPr/>
+        </p:nvSpPr>
+        <p:spPr>
+          <a:xfrm>
+            <a:off x="548640" y="502920"/>
+            <a:ext cx="502920" cy="502920"/>
+          </a:xfrm>
+          <a:prstGeom prst="ellipse">
+            <a:avLst/>
+          </a:prstGeom>
+          <a:solidFill>
+            <a:srgbClr val="DE911D"/>
+          </a:solidFill>
+          <a:ln>
+            <a:noFill/>
+          </a:ln>
+          <a:effectLst/>
+        </p:spPr>
+        <p:style>
+          <a:lnRef idx="1">
+            <a:schemeClr val="accent1"/>
+          </a:lnRef>
+          <a:fillRef idx="3">
+            <a:schemeClr val="accent1"/>
+          </a:fillRef>
+          <a:effectRef idx="2">
+            <a:schemeClr val="accent1"/>
+          </a:effectRef>
+          <a:fontRef idx="minor">
+            <a:schemeClr val="lt1"/>
+          </a:fontRef>
+        </p:style>
+        <p:txBody>
+          <a:bodyPr rtlCol="0" anchor="ctr"/>
+          <a:lstStyle/>
+          <a:p>
+            <a:pPr algn="ctr"/>
+          </a:p>
+        </p:txBody>
+      </p:sp>
+      <p:sp>
+        <p:nvSpPr>
+          <p:cNvPr id="3" name="TextBox 2"/>
+          <p:cNvSpPr txBox="1"/>
+          <p:nvPr/>
+        </p:nvSpPr>
+        <p:spPr>
+          <a:xfrm>
+            <a:off x="548640" y="502920"/>
+            <a:ext cx="502920" cy="502920"/>
+          </a:xfrm>
+          <a:prstGeom prst="rect">
+            <a:avLst/>
+          </a:prstGeom>
+          <a:noFill/>
+        </p:spPr>
+        <p:txBody>
+          <a:bodyPr wrap="square">
+            <a:spAutoFit/>
+          </a:bodyPr>
+          <a:lstStyle/>
+          <a:p>
+            <a:pPr algn="ctr"/>
+            <a:r>
+              <a:rPr sz="2000" b="0">
+                <a:solidFill>
+                  <a:srgbClr val="0A1F33"/>
+                </a:solidFill>
+                <a:latin typeface="Calibri"/>
+              </a:rPr>
+              <a:t>✎</a:t>
+            </a:r>
+          </a:p>
+        </p:txBody>
+      </p:sp>
+      <p:sp>
+        <p:nvSpPr>
+          <p:cNvPr id="4" name="TextBox 3"/>
+          <p:cNvSpPr txBox="1"/>
+          <p:nvPr/>
+        </p:nvSpPr>
+        <p:spPr>
+          <a:xfrm>
+            <a:off x="1234440" y="530352"/>
+            <a:ext cx="9144000" cy="457200"/>
+          </a:xfrm>
+          <a:prstGeom prst="rect">
+            <a:avLst/>
+          </a:prstGeom>
+          <a:noFill/>
+        </p:spPr>
+        <p:txBody>
+          <a:bodyPr wrap="square">
+            <a:spAutoFit/>
+          </a:bodyPr>
+          <a:lstStyle/>
+          <a:p>
+            <a:r>
+              <a:rPr sz="1400" b="1">
+                <a:solidFill>
+                  <a:srgbClr val="DE911D"/>
+                </a:solidFill>
+                <a:latin typeface="Calibri"/>
+              </a:rPr>
+              <a:t>EJERCICIO 3 DE 4</a:t>
+            </a:r>
+          </a:p>
+        </p:txBody>
+      </p:sp>
+      <p:sp>
+        <p:nvSpPr>
+          <p:cNvPr id="5" name="Rectangle 4"/>
+          <p:cNvSpPr/>
+          <p:nvPr/>
+        </p:nvSpPr>
+        <p:spPr>
+          <a:xfrm>
+            <a:off x="548640" y="1188720"/>
+            <a:ext cx="11064240" cy="5029200"/>
+          </a:xfrm>
+          <a:prstGeom prst="rect">
+            <a:avLst/>
+          </a:prstGeom>
+          <a:solidFill>
+            <a:srgbClr val="F0F4F8"/>
+          </a:solidFill>
+          <a:ln>
+            <a:noFill/>
+          </a:ln>
+          <a:effectLst/>
+        </p:spPr>
+        <p:style>
+          <a:lnRef idx="1">
+            <a:schemeClr val="accent1"/>
+          </a:lnRef>
+          <a:fillRef idx="3">
+            <a:schemeClr val="accent1"/>
+          </a:fillRef>
+          <a:effectRef idx="2">
+            <a:schemeClr val="accent1"/>
+          </a:effectRef>
+          <a:fontRef idx="minor">
+            <a:schemeClr val="lt1"/>
+          </a:fontRef>
+        </p:style>
+        <p:txBody>
+          <a:bodyPr rtlCol="0" anchor="ctr"/>
+          <a:lstStyle/>
+          <a:p>
+            <a:pPr algn="ctr"/>
+          </a:p>
+        </p:txBody>
+      </p:sp>
+      <p:sp>
+        <p:nvSpPr>
+          <p:cNvPr id="6" name="TextBox 5"/>
+          <p:cNvSpPr txBox="1"/>
+          <p:nvPr/>
+        </p:nvSpPr>
+        <p:spPr>
+          <a:xfrm>
+            <a:off x="914400" y="1554480"/>
+            <a:ext cx="10332720" cy="4480560"/>
+          </a:xfrm>
+          <a:prstGeom prst="rect">
+            <a:avLst/>
+          </a:prstGeom>
+          <a:noFill/>
+        </p:spPr>
+        <p:txBody>
+          <a:bodyPr wrap="square">
+            <a:spAutoFit/>
+          </a:bodyPr>
+          <a:lstStyle/>
+          <a:p>
+            <a:r>
+              <a:rPr sz="2200" b="0">
+                <a:solidFill>
+                  <a:srgbClr val="0A1F33"/>
+                </a:solidFill>
+                <a:latin typeface="Calibri"/>
+              </a:rPr>
+              <a:t>Escribe el calendario completo de un todos contra todos de 4 jugadores con la tabla de Berger.</a:t>
+            </a:r>
+          </a:p>
+        </p:txBody>
+      </p:sp>
+    </p:spTree>
+  </p:cSld>
+  <p:clrMapOvr>
+    <a:masterClrMapping/>
+  </p:clrMapOvr>
+</p:sld>
+</file>
+
+<file path=ppt/slides/slide19.xml><?xml version="1.0" encoding="utf-8"?>
+<p:sld xmlns:a="http://schemas.openxmlformats.org/drawingml/2006/main" xmlns:p="http://schemas.openxmlformats.org/presentationml/2006/main" xmlns:r="http://schemas.openxmlformats.org/officeDocument/2006/relationships">
+  <p:cSld>
+    <p:spTree>
+      <p:nvGrpSpPr>
+        <p:cNvPr id="1" name=""/>
+        <p:cNvGrpSpPr/>
+        <p:nvPr/>
+      </p:nvGrpSpPr>
+      <p:grpSpPr/>
+      <p:sp>
+        <p:nvSpPr>
+          <p:cNvPr id="2" name="Oval 1"/>
+          <p:cNvSpPr/>
+          <p:nvPr/>
+        </p:nvSpPr>
+        <p:spPr>
+          <a:xfrm>
+            <a:off x="548640" y="502920"/>
+            <a:ext cx="502920" cy="502920"/>
+          </a:xfrm>
+          <a:prstGeom prst="ellipse">
+            <a:avLst/>
+          </a:prstGeom>
+          <a:solidFill>
+            <a:srgbClr val="DE911D"/>
+          </a:solidFill>
+          <a:ln>
+            <a:noFill/>
+          </a:ln>
+          <a:effectLst/>
+        </p:spPr>
+        <p:style>
+          <a:lnRef idx="1">
+            <a:schemeClr val="accent1"/>
+          </a:lnRef>
+          <a:fillRef idx="3">
+            <a:schemeClr val="accent1"/>
+          </a:fillRef>
+          <a:effectRef idx="2">
+            <a:schemeClr val="accent1"/>
+          </a:effectRef>
+          <a:fontRef idx="minor">
+            <a:schemeClr val="lt1"/>
+          </a:fontRef>
+        </p:style>
+        <p:txBody>
+          <a:bodyPr rtlCol="0" anchor="ctr"/>
+          <a:lstStyle/>
+          <a:p>
+            <a:pPr algn="ctr"/>
+          </a:p>
+        </p:txBody>
+      </p:sp>
+      <p:sp>
+        <p:nvSpPr>
+          <p:cNvPr id="3" name="TextBox 2"/>
+          <p:cNvSpPr txBox="1"/>
+          <p:nvPr/>
+        </p:nvSpPr>
+        <p:spPr>
+          <a:xfrm>
+            <a:off x="548640" y="502920"/>
+            <a:ext cx="502920" cy="502920"/>
+          </a:xfrm>
+          <a:prstGeom prst="rect">
+            <a:avLst/>
+          </a:prstGeom>
+          <a:noFill/>
+        </p:spPr>
+        <p:txBody>
+          <a:bodyPr wrap="square">
+            <a:spAutoFit/>
+          </a:bodyPr>
+          <a:lstStyle/>
+          <a:p>
+            <a:pPr algn="ctr"/>
+            <a:r>
+              <a:rPr sz="2000" b="0">
+                <a:solidFill>
+                  <a:srgbClr val="0A1F33"/>
+                </a:solidFill>
+                <a:latin typeface="Calibri"/>
+              </a:rPr>
+              <a:t>✎</a:t>
+            </a:r>
+          </a:p>
+        </p:txBody>
+      </p:sp>
+      <p:sp>
+        <p:nvSpPr>
+          <p:cNvPr id="4" name="TextBox 3"/>
+          <p:cNvSpPr txBox="1"/>
+          <p:nvPr/>
+        </p:nvSpPr>
+        <p:spPr>
+          <a:xfrm>
+            <a:off x="1234440" y="530352"/>
+            <a:ext cx="9144000" cy="457200"/>
+          </a:xfrm>
+          <a:prstGeom prst="rect">
+            <a:avLst/>
+          </a:prstGeom>
+          <a:noFill/>
+        </p:spPr>
+        <p:txBody>
+          <a:bodyPr wrap="square">
+            <a:spAutoFit/>
+          </a:bodyPr>
+          <a:lstStyle/>
+          <a:p>
+            <a:r>
+              <a:rPr sz="1400" b="1">
+                <a:solidFill>
+                  <a:srgbClr val="DE911D"/>
+                </a:solidFill>
+                <a:latin typeface="Calibri"/>
+              </a:rPr>
+              <a:t>EJERCICIO 4 DE 4</a:t>
+            </a:r>
+          </a:p>
+        </p:txBody>
+      </p:sp>
+      <p:sp>
+        <p:nvSpPr>
+          <p:cNvPr id="5" name="Rectangle 4"/>
+          <p:cNvSpPr/>
+          <p:nvPr/>
+        </p:nvSpPr>
+        <p:spPr>
+          <a:xfrm>
+            <a:off x="548640" y="1188720"/>
+            <a:ext cx="11064240" cy="5029200"/>
+          </a:xfrm>
+          <a:prstGeom prst="rect">
+            <a:avLst/>
+          </a:prstGeom>
+          <a:solidFill>
+            <a:srgbClr val="F0F4F8"/>
+          </a:solidFill>
+          <a:ln>
+            <a:noFill/>
+          </a:ln>
+          <a:effectLst/>
+        </p:spPr>
+        <p:style>
+          <a:lnRef idx="1">
+            <a:schemeClr val="accent1"/>
+          </a:lnRef>
+          <a:fillRef idx="3">
+            <a:schemeClr val="accent1"/>
+          </a:fillRef>
+          <a:effectRef idx="2">
+            <a:schemeClr val="accent1"/>
+          </a:effectRef>
+          <a:fontRef idx="minor">
+            <a:schemeClr val="lt1"/>
+          </a:fontRef>
+        </p:style>
+        <p:txBody>
+          <a:bodyPr rtlCol="0" anchor="ctr"/>
+          <a:lstStyle/>
+          <a:p>
+            <a:pPr algn="ctr"/>
+          </a:p>
+        </p:txBody>
+      </p:sp>
+      <p:sp>
+        <p:nvSpPr>
+          <p:cNvPr id="6" name="TextBox 5"/>
+          <p:cNvSpPr txBox="1"/>
+          <p:nvPr/>
+        </p:nvSpPr>
+        <p:spPr>
+          <a:xfrm>
+            <a:off x="914400" y="1554480"/>
+            <a:ext cx="10332720" cy="4480560"/>
+          </a:xfrm>
+          <a:prstGeom prst="rect">
+            <a:avLst/>
+          </a:prstGeom>
+          <a:noFill/>
+        </p:spPr>
+        <p:txBody>
+          <a:bodyPr wrap="square">
+            <a:spAutoFit/>
+          </a:bodyPr>
+          <a:lstStyle/>
+          <a:p>
+            <a:r>
+              <a:rPr sz="2200" b="0">
+                <a:solidFill>
+                  <a:srgbClr val="0A1F33"/>
+                </a:solidFill>
+                <a:latin typeface="Calibri"/>
+              </a:rPr>
+              <a:t>Un suizo tiene 11 jugadores. ¿Qué pasa en cada ronda con el número impar?</a:t>
+            </a:r>
+          </a:p>
+        </p:txBody>
+      </p:sp>
+    </p:spTree>
+  </p:cSld>
+  <p:clrMapOvr>
+    <a:masterClrMapping/>
+  </p:clrMapOvr>
+</p:sld>
+</file>
+
 <file path=ppt/slides/slide2.xml><?xml version="1.0" encoding="utf-8"?>
 <p:sld xmlns:a="http://schemas.openxmlformats.org/drawingml/2006/main" xmlns:p="http://schemas.openxmlformats.org/presentationml/2006/main" xmlns:r="http://schemas.openxmlformats.org/officeDocument/2006/relationships">
   <p:cSld>
@@ -3565,7 +5787,7 @@
                 </a:solidFill>
                 <a:latin typeface="Calibri"/>
               </a:rPr>
-              <a:t>⚖</a:t>
+              <a:t>◎</a:t>
             </a:r>
           </a:p>
         </p:txBody>
@@ -3579,7 +5801,7 @@
         <p:spPr>
           <a:xfrm>
             <a:off x="1234440" y="530352"/>
-            <a:ext cx="7315200" cy="457200"/>
+            <a:ext cx="9144000" cy="457200"/>
           </a:xfrm>
           <a:prstGeom prst="rect">
             <a:avLst/>
@@ -3599,7 +5821,7 @@
                 </a:solidFill>
                 <a:latin typeface="Calibri"/>
               </a:rPr>
-              <a:t>CONTENIDO DE LA SESIÓN</a:t>
+              <a:t>OBJETIVOS DE LA SESIÓN</a:t>
             </a:r>
           </a:p>
         </p:txBody>
@@ -3690,8 +5912,8 @@
         </p:nvSpPr>
         <p:spPr>
           <a:xfrm>
-            <a:off x="1005840" y="2331720"/>
-            <a:ext cx="10241280" cy="3566160"/>
+            <a:off x="914400" y="2194560"/>
+            <a:ext cx="10332720" cy="3931920"/>
           </a:xfrm>
           <a:prstGeom prst="rect">
             <a:avLst/>
@@ -3704,14 +5926,575 @@
           </a:bodyPr>
           <a:lstStyle/>
           <a:p>
-            <a:r>
-              <a:rPr sz="1600" b="0">
+            <a:pPr>
+              <a:spcAft>
+                <a:spcPts val="800"/>
+              </a:spcAft>
+            </a:pPr>
+            <a:r>
+              <a:rPr sz="1800">
                 <a:solidFill>
                   <a:srgbClr val="334E68"/>
                 </a:solidFill>
                 <a:latin typeface="Calibri"/>
               </a:rPr>
-              <a:t>Sistema suizo: principios, conformación de rondas y criterios de emparejamiento.</a:t>
+              <a:t>•  Aplicar las reglas básicas del sistema suizo: rivales, colores y descansos.</a:t>
+            </a:r>
+          </a:p>
+          <a:p>
+            <a:pPr>
+              <a:spcAft>
+                <a:spcPts val="800"/>
+              </a:spcAft>
+            </a:pPr>
+            <a:r>
+              <a:rPr sz="1800">
+                <a:solidFill>
+                  <a:srgbClr val="334E68"/>
+                </a:solidFill>
+                <a:latin typeface="Calibri"/>
+              </a:rPr>
+              <a:t>•  Ordenar la lista inicial y emparejar la primera ronda.</a:t>
+            </a:r>
+          </a:p>
+          <a:p>
+            <a:pPr>
+              <a:spcAft>
+                <a:spcPts val="800"/>
+              </a:spcAft>
+            </a:pPr>
+            <a:r>
+              <a:rPr sz="1800">
+                <a:solidFill>
+                  <a:srgbClr val="334E68"/>
+                </a:solidFill>
+                <a:latin typeface="Calibri"/>
+              </a:rPr>
+              <a:t>•  Emparejar una ronda siguiente por grupos de puntuación.</a:t>
+            </a:r>
+          </a:p>
+          <a:p>
+            <a:pPr>
+              <a:spcAft>
+                <a:spcPts val="800"/>
+              </a:spcAft>
+            </a:pPr>
+            <a:r>
+              <a:rPr sz="1800">
+                <a:solidFill>
+                  <a:srgbClr val="334E68"/>
+                </a:solidFill>
+                <a:latin typeface="Calibri"/>
+              </a:rPr>
+              <a:t>•  Calendarizar un torneo de todos contra todos con las tablas de Berger.</a:t>
+            </a:r>
+          </a:p>
+          <a:p>
+            <a:pPr>
+              <a:spcAft>
+                <a:spcPts val="800"/>
+              </a:spcAft>
+            </a:pPr>
+            <a:r>
+              <a:rPr sz="1800">
+                <a:solidFill>
+                  <a:srgbClr val="334E68"/>
+                </a:solidFill>
+                <a:latin typeface="Calibri"/>
+              </a:rPr>
+              <a:t>•  Elegir el sistema adecuado según participantes, tiempo y objetivo del torneo.</a:t>
+            </a:r>
+          </a:p>
+        </p:txBody>
+      </p:sp>
+    </p:spTree>
+  </p:cSld>
+  <p:clrMapOvr>
+    <a:masterClrMapping/>
+  </p:clrMapOvr>
+</p:sld>
+</file>
+
+<file path=ppt/slides/slide20.xml><?xml version="1.0" encoding="utf-8"?>
+<p:sld xmlns:a="http://schemas.openxmlformats.org/drawingml/2006/main" xmlns:p="http://schemas.openxmlformats.org/presentationml/2006/main" xmlns:r="http://schemas.openxmlformats.org/officeDocument/2006/relationships">
+  <p:cSld>
+    <p:spTree>
+      <p:nvGrpSpPr>
+        <p:cNvPr id="1" name=""/>
+        <p:cNvGrpSpPr/>
+        <p:nvPr/>
+      </p:nvGrpSpPr>
+      <p:grpSpPr/>
+      <p:sp>
+        <p:nvSpPr>
+          <p:cNvPr id="2" name="Oval 1"/>
+          <p:cNvSpPr/>
+          <p:nvPr/>
+        </p:nvSpPr>
+        <p:spPr>
+          <a:xfrm>
+            <a:off x="548640" y="502920"/>
+            <a:ext cx="502920" cy="502920"/>
+          </a:xfrm>
+          <a:prstGeom prst="ellipse">
+            <a:avLst/>
+          </a:prstGeom>
+          <a:solidFill>
+            <a:srgbClr val="DE911D"/>
+          </a:solidFill>
+          <a:ln>
+            <a:noFill/>
+          </a:ln>
+          <a:effectLst/>
+        </p:spPr>
+        <p:style>
+          <a:lnRef idx="1">
+            <a:schemeClr val="accent1"/>
+          </a:lnRef>
+          <a:fillRef idx="3">
+            <a:schemeClr val="accent1"/>
+          </a:fillRef>
+          <a:effectRef idx="2">
+            <a:schemeClr val="accent1"/>
+          </a:effectRef>
+          <a:fontRef idx="minor">
+            <a:schemeClr val="lt1"/>
+          </a:fontRef>
+        </p:style>
+        <p:txBody>
+          <a:bodyPr rtlCol="0" anchor="ctr"/>
+          <a:lstStyle/>
+          <a:p>
+            <a:pPr algn="ctr"/>
+          </a:p>
+        </p:txBody>
+      </p:sp>
+      <p:sp>
+        <p:nvSpPr>
+          <p:cNvPr id="3" name="TextBox 2"/>
+          <p:cNvSpPr txBox="1"/>
+          <p:nvPr/>
+        </p:nvSpPr>
+        <p:spPr>
+          <a:xfrm>
+            <a:off x="548640" y="502920"/>
+            <a:ext cx="502920" cy="502920"/>
+          </a:xfrm>
+          <a:prstGeom prst="rect">
+            <a:avLst/>
+          </a:prstGeom>
+          <a:noFill/>
+        </p:spPr>
+        <p:txBody>
+          <a:bodyPr wrap="square">
+            <a:spAutoFit/>
+          </a:bodyPr>
+          <a:lstStyle/>
+          <a:p>
+            <a:pPr algn="ctr"/>
+            <a:r>
+              <a:rPr sz="2000" b="0">
+                <a:solidFill>
+                  <a:srgbClr val="0A1F33"/>
+                </a:solidFill>
+                <a:latin typeface="Calibri"/>
+              </a:rPr>
+              <a:t>?</a:t>
+            </a:r>
+          </a:p>
+        </p:txBody>
+      </p:sp>
+      <p:sp>
+        <p:nvSpPr>
+          <p:cNvPr id="4" name="TextBox 3"/>
+          <p:cNvSpPr txBox="1"/>
+          <p:nvPr/>
+        </p:nvSpPr>
+        <p:spPr>
+          <a:xfrm>
+            <a:off x="1234440" y="530352"/>
+            <a:ext cx="9144000" cy="457200"/>
+          </a:xfrm>
+          <a:prstGeom prst="rect">
+            <a:avLst/>
+          </a:prstGeom>
+          <a:noFill/>
+        </p:spPr>
+        <p:txBody>
+          <a:bodyPr wrap="square">
+            <a:spAutoFit/>
+          </a:bodyPr>
+          <a:lstStyle/>
+          <a:p>
+            <a:r>
+              <a:rPr sz="1400" b="1">
+                <a:solidFill>
+                  <a:srgbClr val="DE911D"/>
+                </a:solidFill>
+                <a:latin typeface="Calibri"/>
+              </a:rPr>
+              <a:t>QUIZ DE LA SESIÓN</a:t>
+            </a:r>
+          </a:p>
+        </p:txBody>
+      </p:sp>
+      <p:sp>
+        <p:nvSpPr>
+          <p:cNvPr id="5" name="Rectangle 4"/>
+          <p:cNvSpPr/>
+          <p:nvPr/>
+        </p:nvSpPr>
+        <p:spPr>
+          <a:xfrm>
+            <a:off x="548640" y="1188720"/>
+            <a:ext cx="11064240" cy="5029200"/>
+          </a:xfrm>
+          <a:prstGeom prst="rect">
+            <a:avLst/>
+          </a:prstGeom>
+          <a:solidFill>
+            <a:srgbClr val="F0F4F8"/>
+          </a:solidFill>
+          <a:ln>
+            <a:noFill/>
+          </a:ln>
+          <a:effectLst/>
+        </p:spPr>
+        <p:style>
+          <a:lnRef idx="1">
+            <a:schemeClr val="accent1"/>
+          </a:lnRef>
+          <a:fillRef idx="3">
+            <a:schemeClr val="accent1"/>
+          </a:fillRef>
+          <a:effectRef idx="2">
+            <a:schemeClr val="accent1"/>
+          </a:effectRef>
+          <a:fontRef idx="minor">
+            <a:schemeClr val="lt1"/>
+          </a:fontRef>
+        </p:style>
+        <p:txBody>
+          <a:bodyPr rtlCol="0" anchor="ctr"/>
+          <a:lstStyle/>
+          <a:p>
+            <a:pPr algn="ctr"/>
+          </a:p>
+        </p:txBody>
+      </p:sp>
+      <p:sp>
+        <p:nvSpPr>
+          <p:cNvPr id="6" name="TextBox 5"/>
+          <p:cNvSpPr txBox="1"/>
+          <p:nvPr/>
+        </p:nvSpPr>
+        <p:spPr>
+          <a:xfrm>
+            <a:off x="914400" y="1371600"/>
+            <a:ext cx="10332720" cy="4754880"/>
+          </a:xfrm>
+          <a:prstGeom prst="rect">
+            <a:avLst/>
+          </a:prstGeom>
+          <a:noFill/>
+        </p:spPr>
+        <p:txBody>
+          <a:bodyPr wrap="square">
+            <a:spAutoFit/>
+          </a:bodyPr>
+          <a:lstStyle/>
+          <a:p>
+            <a:pPr>
+              <a:spcAft>
+                <a:spcPts val="600"/>
+              </a:spcAft>
+            </a:pPr>
+            <a:r>
+              <a:rPr sz="1400">
+                <a:solidFill>
+                  <a:srgbClr val="334E68"/>
+                </a:solidFill>
+                <a:latin typeface="Calibri"/>
+              </a:rPr>
+              <a:t>1. ¿Qué sistema resulta más adecuado cuando hay muchos participantes y tiempo limitado?</a:t>
+            </a:r>
+          </a:p>
+          <a:p>
+            <a:pPr>
+              <a:spcAft>
+                <a:spcPts val="600"/>
+              </a:spcAft>
+            </a:pPr>
+            <a:r>
+              <a:rPr sz="1400">
+                <a:solidFill>
+                  <a:srgbClr val="334E68"/>
+                </a:solidFill>
+                <a:latin typeface="Calibri"/>
+              </a:rPr>
+              <a:t>2. En el sistema todos contra todos (round robin), ¿qué característica lo define?</a:t>
+            </a:r>
+          </a:p>
+          <a:p>
+            <a:pPr>
+              <a:spcAft>
+                <a:spcPts val="600"/>
+              </a:spcAft>
+            </a:pPr>
+            <a:r>
+              <a:rPr sz="1400">
+                <a:solidFill>
+                  <a:srgbClr val="334E68"/>
+                </a:solidFill>
+                <a:latin typeface="Calibri"/>
+              </a:rPr>
+              <a:t>3. ¿Cómo se ordena la lista inicial de un suizo?</a:t>
+            </a:r>
+          </a:p>
+          <a:p>
+            <a:pPr>
+              <a:spcAft>
+                <a:spcPts val="600"/>
+              </a:spcAft>
+            </a:pPr>
+            <a:r>
+              <a:rPr sz="1400">
+                <a:solidFill>
+                  <a:srgbClr val="334E68"/>
+                </a:solidFill>
+                <a:latin typeface="Calibri"/>
+              </a:rPr>
+              <a:t>4. Publicado el emparejamiento, ¿en qué único caso se puede cambiar?</a:t>
+            </a:r>
+          </a:p>
+          <a:p>
+            <a:pPr>
+              <a:spcAft>
+                <a:spcPts val="600"/>
+              </a:spcAft>
+            </a:pPr>
+            <a:r>
+              <a:rPr sz="1400">
+                <a:solidFill>
+                  <a:srgbClr val="334E68"/>
+                </a:solidFill>
+                <a:latin typeface="Calibri"/>
+              </a:rPr>
+              <a:t>5. ¿Qué recibe en un suizo quien queda libre por número impar?</a:t>
+            </a:r>
+          </a:p>
+          <a:p>
+            <a:pPr>
+              <a:spcAft>
+                <a:spcPts val="600"/>
+              </a:spcAft>
+            </a:pPr>
+            <a:r>
+              <a:rPr sz="1400">
+                <a:solidFill>
+                  <a:srgbClr val="334E68"/>
+                </a:solidFill>
+                <a:latin typeface="Calibri"/>
+              </a:rPr>
+              <a:t>6. ¿Cuántas partidas tiene un todos contra todos de 8 jugadores?</a:t>
+            </a:r>
+          </a:p>
+        </p:txBody>
+      </p:sp>
+    </p:spTree>
+  </p:cSld>
+  <p:clrMapOvr>
+    <a:masterClrMapping/>
+  </p:clrMapOvr>
+</p:sld>
+</file>
+
+<file path=ppt/slides/slide21.xml><?xml version="1.0" encoding="utf-8"?>
+<p:sld xmlns:a="http://schemas.openxmlformats.org/drawingml/2006/main" xmlns:p="http://schemas.openxmlformats.org/presentationml/2006/main" xmlns:r="http://schemas.openxmlformats.org/officeDocument/2006/relationships">
+  <p:cSld>
+    <p:spTree>
+      <p:nvGrpSpPr>
+        <p:cNvPr id="1" name=""/>
+        <p:cNvGrpSpPr/>
+        <p:nvPr/>
+      </p:nvGrpSpPr>
+      <p:grpSpPr/>
+      <p:sp>
+        <p:nvSpPr>
+          <p:cNvPr id="2" name="Rectangle 1"/>
+          <p:cNvSpPr/>
+          <p:nvPr/>
+        </p:nvSpPr>
+        <p:spPr>
+          <a:xfrm>
+            <a:off x="0" y="0"/>
+            <a:ext cx="12191695" cy="6858000"/>
+          </a:xfrm>
+          <a:prstGeom prst="rect">
+            <a:avLst/>
+          </a:prstGeom>
+          <a:solidFill>
+            <a:srgbClr val="0A1F33"/>
+          </a:solidFill>
+          <a:ln>
+            <a:noFill/>
+          </a:ln>
+          <a:effectLst/>
+        </p:spPr>
+        <p:style>
+          <a:lnRef idx="1">
+            <a:schemeClr val="accent1"/>
+          </a:lnRef>
+          <a:fillRef idx="3">
+            <a:schemeClr val="accent1"/>
+          </a:fillRef>
+          <a:effectRef idx="2">
+            <a:schemeClr val="accent1"/>
+          </a:effectRef>
+          <a:fontRef idx="minor">
+            <a:schemeClr val="lt1"/>
+          </a:fontRef>
+        </p:style>
+        <p:txBody>
+          <a:bodyPr rtlCol="0" anchor="ctr"/>
+          <a:lstStyle/>
+          <a:p>
+            <a:pPr algn="ctr"/>
+          </a:p>
+        </p:txBody>
+      </p:sp>
+      <p:sp>
+        <p:nvSpPr>
+          <p:cNvPr id="3" name="TextBox 2"/>
+          <p:cNvSpPr txBox="1"/>
+          <p:nvPr/>
+        </p:nvSpPr>
+        <p:spPr>
+          <a:xfrm>
+            <a:off x="548640" y="731520"/>
+            <a:ext cx="11064240" cy="457200"/>
+          </a:xfrm>
+          <a:prstGeom prst="rect">
+            <a:avLst/>
+          </a:prstGeom>
+          <a:noFill/>
+        </p:spPr>
+        <p:txBody>
+          <a:bodyPr wrap="square">
+            <a:spAutoFit/>
+          </a:bodyPr>
+          <a:lstStyle/>
+          <a:p>
+            <a:r>
+              <a:rPr sz="1400" b="1">
+                <a:solidFill>
+                  <a:srgbClr val="F0B429"/>
+                </a:solidFill>
+                <a:latin typeface="Calibri"/>
+              </a:rPr>
+              <a:t>TAREA PARA LA PRÓXIMA SESIÓN</a:t>
+            </a:r>
+          </a:p>
+        </p:txBody>
+      </p:sp>
+      <p:sp>
+        <p:nvSpPr>
+          <p:cNvPr id="4" name="TextBox 3"/>
+          <p:cNvSpPr txBox="1"/>
+          <p:nvPr/>
+        </p:nvSpPr>
+        <p:spPr>
+          <a:xfrm>
+            <a:off x="548640" y="1371600"/>
+            <a:ext cx="11064240" cy="2926080"/>
+          </a:xfrm>
+          <a:prstGeom prst="rect">
+            <a:avLst/>
+          </a:prstGeom>
+          <a:noFill/>
+        </p:spPr>
+        <p:txBody>
+          <a:bodyPr wrap="square">
+            <a:spAutoFit/>
+          </a:bodyPr>
+          <a:lstStyle/>
+          <a:p>
+            <a:r>
+              <a:rPr sz="2400" b="0">
+                <a:solidFill>
+                  <a:srgbClr val="FFFFFF"/>
+                </a:solidFill>
+                <a:latin typeface="Cambria"/>
+              </a:rPr>
+              <a:t>A partir de los resultados de la ronda 1, elaborar el emparejamiento de la ronda 2 bajo sistema suizo.</a:t>
+            </a:r>
+          </a:p>
+        </p:txBody>
+      </p:sp>
+      <p:sp>
+        <p:nvSpPr>
+          <p:cNvPr id="5" name="TextBox 4"/>
+          <p:cNvSpPr txBox="1"/>
+          <p:nvPr/>
+        </p:nvSpPr>
+        <p:spPr>
+          <a:xfrm>
+            <a:off x="548640" y="4754880"/>
+            <a:ext cx="11064240" cy="914400"/>
+          </a:xfrm>
+          <a:prstGeom prst="rect">
+            <a:avLst/>
+          </a:prstGeom>
+          <a:noFill/>
+        </p:spPr>
+        <p:txBody>
+          <a:bodyPr wrap="square">
+            <a:spAutoFit/>
+          </a:bodyPr>
+          <a:lstStyle/>
+          <a:p>
+            <a:r>
+              <a:rPr sz="1800" b="0">
+                <a:solidFill>
+                  <a:srgbClr val="CADCFC"/>
+                </a:solidFill>
+                <a:latin typeface="Calibri"/>
+              </a:rPr>
+              <a:t>¿Dudas? Este es el momento. Gracias por tu participación.</a:t>
+            </a:r>
+          </a:p>
+        </p:txBody>
+      </p:sp>
+      <p:sp>
+        <p:nvSpPr>
+          <p:cNvPr id="6" name="TextBox 5"/>
+          <p:cNvSpPr txBox="1"/>
+          <p:nvPr/>
+        </p:nvSpPr>
+        <p:spPr>
+          <a:xfrm>
+            <a:off x="548640" y="6263640"/>
+            <a:ext cx="11064240" cy="365760"/>
+          </a:xfrm>
+          <a:prstGeom prst="rect">
+            <a:avLst/>
+          </a:prstGeom>
+          <a:noFill/>
+        </p:spPr>
+        <p:txBody>
+          <a:bodyPr wrap="square">
+            <a:spAutoFit/>
+          </a:bodyPr>
+          <a:lstStyle/>
+          <a:p>
+            <a:r>
+              <a:rPr sz="1200" b="0">
+                <a:solidFill>
+                  <a:srgbClr val="9FB3C8"/>
+                </a:solidFill>
+                <a:latin typeface="Calibri"/>
+              </a:rPr>
+              <a:t>Formación Ajedrez · Sesión 4 · ajedrez-integral.com</a:t>
             </a:r>
           </a:p>
         </p:txBody>
@@ -3808,7 +6591,7 @@
                 </a:solidFill>
                 <a:latin typeface="Calibri"/>
               </a:rPr>
-              <a:t>⚖</a:t>
+              <a:t>◷</a:t>
             </a:r>
           </a:p>
         </p:txBody>
@@ -3822,7 +6605,7 @@
         <p:spPr>
           <a:xfrm>
             <a:off x="1234440" y="530352"/>
-            <a:ext cx="7315200" cy="457200"/>
+            <a:ext cx="9144000" cy="457200"/>
           </a:xfrm>
           <a:prstGeom prst="rect">
             <a:avLst/>
@@ -3842,123 +6625,753 @@
                 </a:solidFill>
                 <a:latin typeface="Calibri"/>
               </a:rPr>
-              <a:t>CONTENIDO DE LA SESIÓN</a:t>
-            </a:r>
-          </a:p>
-        </p:txBody>
-      </p:sp>
-      <p:sp>
-        <p:nvSpPr>
-          <p:cNvPr id="5" name="TextBox 4"/>
-          <p:cNvSpPr txBox="1"/>
-          <p:nvPr/>
-        </p:nvSpPr>
-        <p:spPr>
-          <a:xfrm>
-            <a:off x="548640" y="1051560"/>
-            <a:ext cx="11064240" cy="822960"/>
-          </a:xfrm>
-          <a:prstGeom prst="rect">
-            <a:avLst/>
-          </a:prstGeom>
-          <a:noFill/>
-        </p:spPr>
-        <p:txBody>
-          <a:bodyPr wrap="square">
-            <a:spAutoFit/>
-          </a:bodyPr>
-          <a:lstStyle/>
-          <a:p>
-            <a:r>
-              <a:rPr sz="2400" b="1">
-                <a:solidFill>
-                  <a:srgbClr val="0A1F33"/>
-                </a:solidFill>
-                <a:latin typeface="Cambria"/>
-              </a:rPr>
-              <a:t>Sistemas de emparejamiento para torneos</a:t>
-            </a:r>
-          </a:p>
-        </p:txBody>
-      </p:sp>
-      <p:sp>
-        <p:nvSpPr>
-          <p:cNvPr id="6" name="Rectangle 5"/>
-          <p:cNvSpPr/>
-          <p:nvPr/>
-        </p:nvSpPr>
-        <p:spPr>
-          <a:xfrm>
-            <a:off x="548640" y="1965960"/>
-            <a:ext cx="11064240" cy="4297680"/>
-          </a:xfrm>
-          <a:prstGeom prst="rect">
-            <a:avLst/>
-          </a:prstGeom>
-          <a:solidFill>
-            <a:srgbClr val="F0F4F8"/>
-          </a:solidFill>
-          <a:ln>
-            <a:noFill/>
-          </a:ln>
-          <a:effectLst/>
-        </p:spPr>
-        <p:style>
-          <a:lnRef idx="1">
-            <a:schemeClr val="accent1"/>
-          </a:lnRef>
-          <a:fillRef idx="3">
-            <a:schemeClr val="accent1"/>
-          </a:fillRef>
-          <a:effectRef idx="2">
-            <a:schemeClr val="accent1"/>
-          </a:effectRef>
-          <a:fontRef idx="minor">
-            <a:schemeClr val="lt1"/>
-          </a:fontRef>
-        </p:style>
-        <p:txBody>
-          <a:bodyPr rtlCol="0" anchor="ctr"/>
-          <a:lstStyle/>
-          <a:p>
-            <a:pPr algn="ctr"/>
-          </a:p>
-        </p:txBody>
-      </p:sp>
-      <p:sp>
-        <p:nvSpPr>
-          <p:cNvPr id="7" name="TextBox 6"/>
-          <p:cNvSpPr txBox="1"/>
-          <p:nvPr/>
-        </p:nvSpPr>
-        <p:spPr>
-          <a:xfrm>
-            <a:off x="1005840" y="2331720"/>
-            <a:ext cx="10241280" cy="3566160"/>
-          </a:xfrm>
-          <a:prstGeom prst="rect">
-            <a:avLst/>
-          </a:prstGeom>
-          <a:noFill/>
-        </p:spPr>
-        <p:txBody>
-          <a:bodyPr wrap="square">
-            <a:spAutoFit/>
-          </a:bodyPr>
-          <a:lstStyle/>
-          <a:p>
-            <a:r>
-              <a:rPr sz="1600" b="0">
-                <a:solidFill>
-                  <a:srgbClr val="334E68"/>
-                </a:solidFill>
-                <a:latin typeface="Calibri"/>
-              </a:rPr>
-              <a:t>Sistema todos contra todos (round robin): calendarización y control de resultados.</a:t>
-            </a:r>
-          </a:p>
-        </p:txBody>
-      </p:sp>
+              <a:t>CRONOGRAMA DE LA SESIÓN · 5 HORAS</a:t>
+            </a:r>
+          </a:p>
+        </p:txBody>
+      </p:sp>
+      <p:graphicFrame>
+        <p:nvGraphicFramePr>
+          <p:cNvPr id="5" name="Table 4"/>
+          <p:cNvGraphicFramePr>
+            <a:graphicFrameLocks noGrp="1"/>
+          </p:cNvGraphicFramePr>
+          <p:nvPr/>
+        </p:nvGraphicFramePr>
+        <p:xfrm>
+          <a:off x="548640" y="1143000"/>
+          <a:ext cx="11064240" cy="5029200"/>
+        </p:xfrm>
+        <a:graphic>
+          <a:graphicData uri="http://schemas.openxmlformats.org/drawingml/2006/table">
+            <a:tbl>
+              <a:tblPr firstRow="1" bandRow="1">
+                <a:tableStyleId>{5C22544A-7EE6-4342-B048-85BDC9FD1C3A}</a:tableStyleId>
+              </a:tblPr>
+              <a:tblGrid>
+                <a:gridCol w="1737360"/>
+                <a:gridCol w="1188720"/>
+                <a:gridCol w="8138160"/>
+              </a:tblGrid>
+              <a:tr h="457200">
+                <a:tc>
+                  <a:txBody>
+                    <a:bodyPr/>
+                    <a:lstStyle/>
+                    <a:p>
+                      <a:r>
+                        <a:rPr sz="1300" b="1">
+                          <a:solidFill>
+                            <a:srgbClr val="FFFFFF"/>
+                          </a:solidFill>
+                        </a:rPr>
+                        <a:t>Tiempo</a:t>
+                      </a:r>
+                    </a:p>
+                  </a:txBody>
+                  <a:tcPr>
+                    <a:solidFill>
+                      <a:srgbClr val="102A43"/>
+                    </a:solidFill>
+                  </a:tcPr>
+                </a:tc>
+                <a:tc>
+                  <a:txBody>
+                    <a:bodyPr/>
+                    <a:lstStyle/>
+                    <a:p>
+                      <a:r>
+                        <a:rPr sz="1300" b="1">
+                          <a:solidFill>
+                            <a:srgbClr val="FFFFFF"/>
+                          </a:solidFill>
+                        </a:rPr>
+                        <a:t>Duración</a:t>
+                      </a:r>
+                    </a:p>
+                  </a:txBody>
+                  <a:tcPr>
+                    <a:solidFill>
+                      <a:srgbClr val="102A43"/>
+                    </a:solidFill>
+                  </a:tcPr>
+                </a:tc>
+                <a:tc>
+                  <a:txBody>
+                    <a:bodyPr/>
+                    <a:lstStyle/>
+                    <a:p>
+                      <a:r>
+                        <a:rPr sz="1300" b="1">
+                          <a:solidFill>
+                            <a:srgbClr val="FFFFFF"/>
+                          </a:solidFill>
+                        </a:rPr>
+                        <a:t>Actividad</a:t>
+                      </a:r>
+                    </a:p>
+                  </a:txBody>
+                  <a:tcPr>
+                    <a:solidFill>
+                      <a:srgbClr val="102A43"/>
+                    </a:solidFill>
+                  </a:tcPr>
+                </a:tc>
+              </a:tr>
+              <a:tr h="457200">
+                <a:tc>
+                  <a:txBody>
+                    <a:bodyPr/>
+                    <a:lstStyle/>
+                    <a:p>
+                      <a:r>
+                        <a:rPr sz="1200" b="0">
+                          <a:solidFill>
+                            <a:srgbClr val="334E68"/>
+                          </a:solidFill>
+                        </a:rPr>
+                        <a:t>0:00 – 0:15</a:t>
+                      </a:r>
+                    </a:p>
+                  </a:txBody>
+                  <a:tcPr>
+                    <a:solidFill>
+                      <a:srgbClr val="F0F4F8"/>
+                    </a:solidFill>
+                  </a:tcPr>
+                </a:tc>
+                <a:tc>
+                  <a:txBody>
+                    <a:bodyPr/>
+                    <a:lstStyle/>
+                    <a:p>
+                      <a:r>
+                        <a:rPr sz="1200" b="0">
+                          <a:solidFill>
+                            <a:srgbClr val="334E68"/>
+                          </a:solidFill>
+                        </a:rPr>
+                        <a:t>15 min</a:t>
+                      </a:r>
+                    </a:p>
+                  </a:txBody>
+                  <a:tcPr>
+                    <a:solidFill>
+                      <a:srgbClr val="F0F4F8"/>
+                    </a:solidFill>
+                  </a:tcPr>
+                </a:tc>
+                <a:tc>
+                  <a:txBody>
+                    <a:bodyPr/>
+                    <a:lstStyle/>
+                    <a:p>
+                      <a:r>
+                        <a:rPr sz="1200" b="0">
+                          <a:solidFill>
+                            <a:srgbClr val="334E68"/>
+                          </a:solidFill>
+                        </a:rPr>
+                        <a:t>Repaso y revisión de la tarea</a:t>
+                      </a:r>
+                    </a:p>
+                  </a:txBody>
+                  <a:tcPr>
+                    <a:solidFill>
+                      <a:srgbClr val="F0F4F8"/>
+                    </a:solidFill>
+                  </a:tcPr>
+                </a:tc>
+              </a:tr>
+              <a:tr h="457200">
+                <a:tc>
+                  <a:txBody>
+                    <a:bodyPr/>
+                    <a:lstStyle/>
+                    <a:p>
+                      <a:r>
+                        <a:rPr sz="1200" b="0">
+                          <a:solidFill>
+                            <a:srgbClr val="334E68"/>
+                          </a:solidFill>
+                        </a:rPr>
+                        <a:t>0:15 – 1:00</a:t>
+                      </a:r>
+                    </a:p>
+                  </a:txBody>
+                  <a:tcPr>
+                    <a:solidFill>
+                      <a:srgbClr val="FFFFFF"/>
+                    </a:solidFill>
+                  </a:tcPr>
+                </a:tc>
+                <a:tc>
+                  <a:txBody>
+                    <a:bodyPr/>
+                    <a:lstStyle/>
+                    <a:p>
+                      <a:r>
+                        <a:rPr sz="1200" b="0">
+                          <a:solidFill>
+                            <a:srgbClr val="334E68"/>
+                          </a:solidFill>
+                        </a:rPr>
+                        <a:t>45 min</a:t>
+                      </a:r>
+                    </a:p>
+                  </a:txBody>
+                  <a:tcPr>
+                    <a:solidFill>
+                      <a:srgbClr val="FFFFFF"/>
+                    </a:solidFill>
+                  </a:tcPr>
+                </a:tc>
+                <a:tc>
+                  <a:txBody>
+                    <a:bodyPr/>
+                    <a:lstStyle/>
+                    <a:p>
+                      <a:r>
+                        <a:rPr sz="1200" b="0">
+                          <a:solidFill>
+                            <a:srgbClr val="334E68"/>
+                          </a:solidFill>
+                        </a:rPr>
+                        <a:t>El sistema suizo: reglas básicas</a:t>
+                      </a:r>
+                    </a:p>
+                  </a:txBody>
+                  <a:tcPr>
+                    <a:solidFill>
+                      <a:srgbClr val="FFFFFF"/>
+                    </a:solidFill>
+                  </a:tcPr>
+                </a:tc>
+              </a:tr>
+              <a:tr h="457200">
+                <a:tc>
+                  <a:txBody>
+                    <a:bodyPr/>
+                    <a:lstStyle/>
+                    <a:p>
+                      <a:r>
+                        <a:rPr sz="1200" b="0">
+                          <a:solidFill>
+                            <a:srgbClr val="334E68"/>
+                          </a:solidFill>
+                        </a:rPr>
+                        <a:t>1:00 – 1:40</a:t>
+                      </a:r>
+                    </a:p>
+                  </a:txBody>
+                  <a:tcPr>
+                    <a:solidFill>
+                      <a:srgbClr val="F0F4F8"/>
+                    </a:solidFill>
+                  </a:tcPr>
+                </a:tc>
+                <a:tc>
+                  <a:txBody>
+                    <a:bodyPr/>
+                    <a:lstStyle/>
+                    <a:p>
+                      <a:r>
+                        <a:rPr sz="1200" b="0">
+                          <a:solidFill>
+                            <a:srgbClr val="334E68"/>
+                          </a:solidFill>
+                        </a:rPr>
+                        <a:t>40 min</a:t>
+                      </a:r>
+                    </a:p>
+                  </a:txBody>
+                  <a:tcPr>
+                    <a:solidFill>
+                      <a:srgbClr val="F0F4F8"/>
+                    </a:solidFill>
+                  </a:tcPr>
+                </a:tc>
+                <a:tc>
+                  <a:txBody>
+                    <a:bodyPr/>
+                    <a:lstStyle/>
+                    <a:p>
+                      <a:r>
+                        <a:rPr sz="1200" b="0">
+                          <a:solidFill>
+                            <a:srgbClr val="334E68"/>
+                          </a:solidFill>
+                        </a:rPr>
+                        <a:t>La primera ronda</a:t>
+                      </a:r>
+                    </a:p>
+                  </a:txBody>
+                  <a:tcPr>
+                    <a:solidFill>
+                      <a:srgbClr val="F0F4F8"/>
+                    </a:solidFill>
+                  </a:tcPr>
+                </a:tc>
+              </a:tr>
+              <a:tr h="457200">
+                <a:tc>
+                  <a:txBody>
+                    <a:bodyPr/>
+                    <a:lstStyle/>
+                    <a:p>
+                      <a:r>
+                        <a:rPr sz="1200" b="1">
+                          <a:solidFill>
+                            <a:srgbClr val="DE911D"/>
+                          </a:solidFill>
+                        </a:rPr>
+                        <a:t>1:40 – 1:55</a:t>
+                      </a:r>
+                    </a:p>
+                  </a:txBody>
+                  <a:tcPr>
+                    <a:solidFill>
+                      <a:srgbClr val="FFFFFF"/>
+                    </a:solidFill>
+                  </a:tcPr>
+                </a:tc>
+                <a:tc>
+                  <a:txBody>
+                    <a:bodyPr/>
+                    <a:lstStyle/>
+                    <a:p>
+                      <a:r>
+                        <a:rPr sz="1200" b="1">
+                          <a:solidFill>
+                            <a:srgbClr val="DE911D"/>
+                          </a:solidFill>
+                        </a:rPr>
+                        <a:t>15 min</a:t>
+                      </a:r>
+                    </a:p>
+                  </a:txBody>
+                  <a:tcPr>
+                    <a:solidFill>
+                      <a:srgbClr val="FFFFFF"/>
+                    </a:solidFill>
+                  </a:tcPr>
+                </a:tc>
+                <a:tc>
+                  <a:txBody>
+                    <a:bodyPr/>
+                    <a:lstStyle/>
+                    <a:p>
+                      <a:r>
+                        <a:rPr sz="1200" b="1">
+                          <a:solidFill>
+                            <a:srgbClr val="DE911D"/>
+                          </a:solidFill>
+                        </a:rPr>
+                        <a:t>Receso</a:t>
+                      </a:r>
+                    </a:p>
+                  </a:txBody>
+                  <a:tcPr>
+                    <a:solidFill>
+                      <a:srgbClr val="FFFFFF"/>
+                    </a:solidFill>
+                  </a:tcPr>
+                </a:tc>
+              </a:tr>
+              <a:tr h="457200">
+                <a:tc>
+                  <a:txBody>
+                    <a:bodyPr/>
+                    <a:lstStyle/>
+                    <a:p>
+                      <a:r>
+                        <a:rPr sz="1200" b="0">
+                          <a:solidFill>
+                            <a:srgbClr val="334E68"/>
+                          </a:solidFill>
+                        </a:rPr>
+                        <a:t>1:55 – 2:35</a:t>
+                      </a:r>
+                    </a:p>
+                  </a:txBody>
+                  <a:tcPr>
+                    <a:solidFill>
+                      <a:srgbClr val="F0F4F8"/>
+                    </a:solidFill>
+                  </a:tcPr>
+                </a:tc>
+                <a:tc>
+                  <a:txBody>
+                    <a:bodyPr/>
+                    <a:lstStyle/>
+                    <a:p>
+                      <a:r>
+                        <a:rPr sz="1200" b="0">
+                          <a:solidFill>
+                            <a:srgbClr val="334E68"/>
+                          </a:solidFill>
+                        </a:rPr>
+                        <a:t>40 min</a:t>
+                      </a:r>
+                    </a:p>
+                  </a:txBody>
+                  <a:tcPr>
+                    <a:solidFill>
+                      <a:srgbClr val="F0F4F8"/>
+                    </a:solidFill>
+                  </a:tcPr>
+                </a:tc>
+                <a:tc>
+                  <a:txBody>
+                    <a:bodyPr/>
+                    <a:lstStyle/>
+                    <a:p>
+                      <a:r>
+                        <a:rPr sz="1200" b="0">
+                          <a:solidFill>
+                            <a:srgbClr val="334E68"/>
+                          </a:solidFill>
+                        </a:rPr>
+                        <a:t>Las rondas siguientes</a:t>
+                      </a:r>
+                    </a:p>
+                  </a:txBody>
+                  <a:tcPr>
+                    <a:solidFill>
+                      <a:srgbClr val="F0F4F8"/>
+                    </a:solidFill>
+                  </a:tcPr>
+                </a:tc>
+              </a:tr>
+              <a:tr h="457200">
+                <a:tc>
+                  <a:txBody>
+                    <a:bodyPr/>
+                    <a:lstStyle/>
+                    <a:p>
+                      <a:r>
+                        <a:rPr sz="1200" b="0">
+                          <a:solidFill>
+                            <a:srgbClr val="334E68"/>
+                          </a:solidFill>
+                        </a:rPr>
+                        <a:t>2:35 – 3:05</a:t>
+                      </a:r>
+                    </a:p>
+                  </a:txBody>
+                  <a:tcPr>
+                    <a:solidFill>
+                      <a:srgbClr val="FFFFFF"/>
+                    </a:solidFill>
+                  </a:tcPr>
+                </a:tc>
+                <a:tc>
+                  <a:txBody>
+                    <a:bodyPr/>
+                    <a:lstStyle/>
+                    <a:p>
+                      <a:r>
+                        <a:rPr sz="1200" b="0">
+                          <a:solidFill>
+                            <a:srgbClr val="334E68"/>
+                          </a:solidFill>
+                        </a:rPr>
+                        <a:t>30 min</a:t>
+                      </a:r>
+                    </a:p>
+                  </a:txBody>
+                  <a:tcPr>
+                    <a:solidFill>
+                      <a:srgbClr val="FFFFFF"/>
+                    </a:solidFill>
+                  </a:tcPr>
+                </a:tc>
+                <a:tc>
+                  <a:txBody>
+                    <a:bodyPr/>
+                    <a:lstStyle/>
+                    <a:p>
+                      <a:r>
+                        <a:rPr sz="1200" b="0">
+                          <a:solidFill>
+                            <a:srgbClr val="334E68"/>
+                          </a:solidFill>
+                        </a:rPr>
+                        <a:t>Todos contra todos (round robin)</a:t>
+                      </a:r>
+                    </a:p>
+                  </a:txBody>
+                  <a:tcPr>
+                    <a:solidFill>
+                      <a:srgbClr val="FFFFFF"/>
+                    </a:solidFill>
+                  </a:tcPr>
+                </a:tc>
+              </a:tr>
+              <a:tr h="457200">
+                <a:tc>
+                  <a:txBody>
+                    <a:bodyPr/>
+                    <a:lstStyle/>
+                    <a:p>
+                      <a:r>
+                        <a:rPr sz="1200" b="1">
+                          <a:solidFill>
+                            <a:srgbClr val="DE911D"/>
+                          </a:solidFill>
+                        </a:rPr>
+                        <a:t>3:05 – 3:20</a:t>
+                      </a:r>
+                    </a:p>
+                  </a:txBody>
+                  <a:tcPr>
+                    <a:solidFill>
+                      <a:srgbClr val="F0F4F8"/>
+                    </a:solidFill>
+                  </a:tcPr>
+                </a:tc>
+                <a:tc>
+                  <a:txBody>
+                    <a:bodyPr/>
+                    <a:lstStyle/>
+                    <a:p>
+                      <a:r>
+                        <a:rPr sz="1200" b="1">
+                          <a:solidFill>
+                            <a:srgbClr val="DE911D"/>
+                          </a:solidFill>
+                        </a:rPr>
+                        <a:t>15 min</a:t>
+                      </a:r>
+                    </a:p>
+                  </a:txBody>
+                  <a:tcPr>
+                    <a:solidFill>
+                      <a:srgbClr val="F0F4F8"/>
+                    </a:solidFill>
+                  </a:tcPr>
+                </a:tc>
+                <a:tc>
+                  <a:txBody>
+                    <a:bodyPr/>
+                    <a:lstStyle/>
+                    <a:p>
+                      <a:r>
+                        <a:rPr sz="1200" b="1">
+                          <a:solidFill>
+                            <a:srgbClr val="DE911D"/>
+                          </a:solidFill>
+                        </a:rPr>
+                        <a:t>Receso</a:t>
+                      </a:r>
+                    </a:p>
+                  </a:txBody>
+                  <a:tcPr>
+                    <a:solidFill>
+                      <a:srgbClr val="F0F4F8"/>
+                    </a:solidFill>
+                  </a:tcPr>
+                </a:tc>
+              </a:tr>
+              <a:tr h="457200">
+                <a:tc>
+                  <a:txBody>
+                    <a:bodyPr/>
+                    <a:lstStyle/>
+                    <a:p>
+                      <a:r>
+                        <a:rPr sz="1200" b="0">
+                          <a:solidFill>
+                            <a:srgbClr val="334E68"/>
+                          </a:solidFill>
+                        </a:rPr>
+                        <a:t>3:20 – 4:10</a:t>
+                      </a:r>
+                    </a:p>
+                  </a:txBody>
+                  <a:tcPr>
+                    <a:solidFill>
+                      <a:srgbClr val="FFFFFF"/>
+                    </a:solidFill>
+                  </a:tcPr>
+                </a:tc>
+                <a:tc>
+                  <a:txBody>
+                    <a:bodyPr/>
+                    <a:lstStyle/>
+                    <a:p>
+                      <a:r>
+                        <a:rPr sz="1200" b="0">
+                          <a:solidFill>
+                            <a:srgbClr val="334E68"/>
+                          </a:solidFill>
+                        </a:rPr>
+                        <a:t>50 min</a:t>
+                      </a:r>
+                    </a:p>
+                  </a:txBody>
+                  <a:tcPr>
+                    <a:solidFill>
+                      <a:srgbClr val="FFFFFF"/>
+                    </a:solidFill>
+                  </a:tcPr>
+                </a:tc>
+                <a:tc>
+                  <a:txBody>
+                    <a:bodyPr/>
+                    <a:lstStyle/>
+                    <a:p>
+                      <a:r>
+                        <a:rPr sz="1200" b="0">
+                          <a:solidFill>
+                            <a:srgbClr val="334E68"/>
+                          </a:solidFill>
+                        </a:rPr>
+                        <a:t>Práctica: construcción de cuadros</a:t>
+                      </a:r>
+                    </a:p>
+                  </a:txBody>
+                  <a:tcPr>
+                    <a:solidFill>
+                      <a:srgbClr val="FFFFFF"/>
+                    </a:solidFill>
+                  </a:tcPr>
+                </a:tc>
+              </a:tr>
+              <a:tr h="457200">
+                <a:tc>
+                  <a:txBody>
+                    <a:bodyPr/>
+                    <a:lstStyle/>
+                    <a:p>
+                      <a:r>
+                        <a:rPr sz="1200" b="0">
+                          <a:solidFill>
+                            <a:srgbClr val="334E68"/>
+                          </a:solidFill>
+                        </a:rPr>
+                        <a:t>4:10 – 4:40</a:t>
+                      </a:r>
+                    </a:p>
+                  </a:txBody>
+                  <a:tcPr>
+                    <a:solidFill>
+                      <a:srgbClr val="F0F4F8"/>
+                    </a:solidFill>
+                  </a:tcPr>
+                </a:tc>
+                <a:tc>
+                  <a:txBody>
+                    <a:bodyPr/>
+                    <a:lstStyle/>
+                    <a:p>
+                      <a:r>
+                        <a:rPr sz="1200" b="0">
+                          <a:solidFill>
+                            <a:srgbClr val="334E68"/>
+                          </a:solidFill>
+                        </a:rPr>
+                        <a:t>30 min</a:t>
+                      </a:r>
+                    </a:p>
+                  </a:txBody>
+                  <a:tcPr>
+                    <a:solidFill>
+                      <a:srgbClr val="F0F4F8"/>
+                    </a:solidFill>
+                  </a:tcPr>
+                </a:tc>
+                <a:tc>
+                  <a:txBody>
+                    <a:bodyPr/>
+                    <a:lstStyle/>
+                    <a:p>
+                      <a:r>
+                        <a:rPr sz="1200" b="0">
+                          <a:solidFill>
+                            <a:srgbClr val="334E68"/>
+                          </a:solidFill>
+                        </a:rPr>
+                        <a:t>Quiz de la sesión</a:t>
+                      </a:r>
+                    </a:p>
+                  </a:txBody>
+                  <a:tcPr>
+                    <a:solidFill>
+                      <a:srgbClr val="F0F4F8"/>
+                    </a:solidFill>
+                  </a:tcPr>
+                </a:tc>
+              </a:tr>
+              <a:tr h="457200">
+                <a:tc>
+                  <a:txBody>
+                    <a:bodyPr/>
+                    <a:lstStyle/>
+                    <a:p>
+                      <a:r>
+                        <a:rPr sz="1200" b="0">
+                          <a:solidFill>
+                            <a:srgbClr val="334E68"/>
+                          </a:solidFill>
+                        </a:rPr>
+                        <a:t>4:40 – 5:00</a:t>
+                      </a:r>
+                    </a:p>
+                  </a:txBody>
+                  <a:tcPr>
+                    <a:solidFill>
+                      <a:srgbClr val="FFFFFF"/>
+                    </a:solidFill>
+                  </a:tcPr>
+                </a:tc>
+                <a:tc>
+                  <a:txBody>
+                    <a:bodyPr/>
+                    <a:lstStyle/>
+                    <a:p>
+                      <a:r>
+                        <a:rPr sz="1200" b="0">
+                          <a:solidFill>
+                            <a:srgbClr val="334E68"/>
+                          </a:solidFill>
+                        </a:rPr>
+                        <a:t>20 min</a:t>
+                      </a:r>
+                    </a:p>
+                  </a:txBody>
+                  <a:tcPr>
+                    <a:solidFill>
+                      <a:srgbClr val="FFFFFF"/>
+                    </a:solidFill>
+                  </a:tcPr>
+                </a:tc>
+                <a:tc>
+                  <a:txBody>
+                    <a:bodyPr/>
+                    <a:lstStyle/>
+                    <a:p>
+                      <a:r>
+                        <a:rPr sz="1200" b="0">
+                          <a:solidFill>
+                            <a:srgbClr val="334E68"/>
+                          </a:solidFill>
+                        </a:rPr>
+                        <a:t>Cierre</a:t>
+                      </a:r>
+                    </a:p>
+                  </a:txBody>
+                  <a:tcPr>
+                    <a:solidFill>
+                      <a:srgbClr val="FFFFFF"/>
+                    </a:solidFill>
+                  </a:tcPr>
+                </a:tc>
+              </a:tr>
+            </a:tbl>
+          </a:graphicData>
+        </a:graphic>
+      </p:graphicFrame>
     </p:spTree>
   </p:cSld>
   <p:clrMapOvr>
@@ -4065,7 +7478,7 @@
         <p:spPr>
           <a:xfrm>
             <a:off x="1234440" y="530352"/>
-            <a:ext cx="7315200" cy="457200"/>
+            <a:ext cx="9144000" cy="457200"/>
           </a:xfrm>
           <a:prstGeom prst="rect">
             <a:avLst/>
@@ -4085,7 +7498,7 @@
                 </a:solidFill>
                 <a:latin typeface="Calibri"/>
               </a:rPr>
-              <a:t>CONTENIDO DE LA SESIÓN</a:t>
+              <a:t>CONTENIDO PARA VER EN CLASE</a:t>
             </a:r>
           </a:p>
         </p:txBody>
@@ -4113,13 +7526,13 @@
           <a:lstStyle/>
           <a:p>
             <a:r>
-              <a:rPr sz="2400" b="1">
+              <a:rPr sz="2600" b="1">
                 <a:solidFill>
                   <a:srgbClr val="0A1F33"/>
                 </a:solidFill>
                 <a:latin typeface="Cambria"/>
               </a:rPr>
-              <a:t>Sistemas de emparejamiento para torneos</a:t>
+              <a:t>Reglas básicas de todo sistema suizo</a:t>
             </a:r>
           </a:p>
         </p:txBody>
@@ -4132,8 +7545,8 @@
         </p:nvSpPr>
         <p:spPr>
           <a:xfrm>
-            <a:off x="548640" y="1965960"/>
-            <a:ext cx="11064240" cy="4297680"/>
+            <a:off x="548640" y="1874519"/>
+            <a:ext cx="11064240" cy="4389120"/>
           </a:xfrm>
           <a:prstGeom prst="rect">
             <a:avLst/>
@@ -4176,8 +7589,8 @@
         </p:nvSpPr>
         <p:spPr>
           <a:xfrm>
-            <a:off x="1005840" y="2331720"/>
-            <a:ext cx="10241280" cy="3566160"/>
+            <a:off x="914400" y="2011680"/>
+            <a:ext cx="10332720" cy="1371600"/>
           </a:xfrm>
           <a:prstGeom prst="rect">
             <a:avLst/>
@@ -4191,13 +7604,134 @@
           <a:lstStyle/>
           <a:p>
             <a:r>
-              <a:rPr sz="1600" b="0">
+              <a:rPr sz="1500" b="0">
+                <a:solidFill>
+                  <a:srgbClr val="0A1F33"/>
+                </a:solidFill>
+                <a:latin typeface="Calibri"/>
+              </a:rPr>
+              <a:t>En el suizo se empareja ronda a ronda a jugadores con puntuaciones iguales o parecidas. Su regla absoluta es que dos jugadores no se enfrentan más de una vez, por encima de puntuaciones y colores.</a:t>
+            </a:r>
+          </a:p>
+        </p:txBody>
+      </p:sp>
+      <p:sp>
+        <p:nvSpPr>
+          <p:cNvPr id="8" name="TextBox 7"/>
+          <p:cNvSpPr txBox="1"/>
+          <p:nvPr/>
+        </p:nvSpPr>
+        <p:spPr>
+          <a:xfrm>
+            <a:off x="914400" y="3429000"/>
+            <a:ext cx="10332720" cy="2743200"/>
+          </a:xfrm>
+          <a:prstGeom prst="rect">
+            <a:avLst/>
+          </a:prstGeom>
+          <a:noFill/>
+        </p:spPr>
+        <p:txBody>
+          <a:bodyPr wrap="square">
+            <a:spAutoFit/>
+          </a:bodyPr>
+          <a:lstStyle/>
+          <a:p>
+            <a:pPr>
+              <a:spcAft>
+                <a:spcPts val="800"/>
+              </a:spcAft>
+            </a:pPr>
+            <a:r>
+              <a:rPr sz="1500">
                 <a:solidFill>
                   <a:srgbClr val="334E68"/>
                 </a:solidFill>
                 <a:latin typeface="Calibri"/>
               </a:rPr>
-              <a:t>Criterios para seleccionar el sistema según cantidad de participantes, tiempo disponible y objetivo del torneo.</a:t>
+              <a:t>•  La diferencia entre partidas con blancas y con negras de un jugador no puede superar 2 ni bajar de -2.</a:t>
+            </a:r>
+          </a:p>
+          <a:p>
+            <a:pPr>
+              <a:spcAft>
+                <a:spcPts val="800"/>
+              </a:spcAft>
+            </a:pPr>
+            <a:r>
+              <a:rPr sz="1500">
+                <a:solidFill>
+                  <a:srgbClr val="334E68"/>
+                </a:solidFill>
+                <a:latin typeface="Calibri"/>
+              </a:rPr>
+              <a:t>•  Ningún jugador recibe el mismo color tres veces seguidas (con excepciones en la última ronda).</a:t>
+            </a:r>
+          </a:p>
+          <a:p>
+            <a:pPr>
+              <a:spcAft>
+                <a:spcPts val="800"/>
+              </a:spcAft>
+            </a:pPr>
+            <a:r>
+              <a:rPr sz="1500">
+                <a:solidFill>
+                  <a:srgbClr val="334E68"/>
+                </a:solidFill>
+                <a:latin typeface="Calibri"/>
+              </a:rPr>
+              <a:t>•  Con número impar, un jugador queda libre (bye): recibe un punto sin color, y no puede recibirlo dos veces.</a:t>
+            </a:r>
+          </a:p>
+          <a:p>
+            <a:pPr>
+              <a:spcAft>
+                <a:spcPts val="800"/>
+              </a:spcAft>
+            </a:pPr>
+            <a:r>
+              <a:rPr sz="1500">
+                <a:solidFill>
+                  <a:srgbClr val="334E68"/>
+                </a:solidFill>
+                <a:latin typeface="Calibri"/>
+              </a:rPr>
+              <a:t>•  El número de rondas se fija y se anuncia antes de empezar.</a:t>
+            </a:r>
+          </a:p>
+        </p:txBody>
+      </p:sp>
+      <p:sp>
+        <p:nvSpPr>
+          <p:cNvPr id="9" name="TextBox 8"/>
+          <p:cNvSpPr txBox="1"/>
+          <p:nvPr/>
+        </p:nvSpPr>
+        <p:spPr>
+          <a:xfrm>
+            <a:off x="548640" y="6355080"/>
+            <a:ext cx="11064240" cy="365760"/>
+          </a:xfrm>
+          <a:prstGeom prst="rect">
+            <a:avLst/>
+          </a:prstGeom>
+          <a:noFill/>
+        </p:spPr>
+        <p:txBody>
+          <a:bodyPr wrap="square">
+            <a:spAutoFit/>
+          </a:bodyPr>
+          <a:lstStyle/>
+          <a:p>
+            <a:r>
+              <a:rPr sz="1100" b="0">
+                <a:solidFill>
+                  <a:srgbClr val="627D98"/>
+                </a:solidFill>
+                <a:latin typeface="Calibri"/>
+              </a:rPr>
+              <a:t>Fuente: Reglas básicas del sistema suizo (Handbook C.04.1)</a:t>
             </a:r>
           </a:p>
         </p:txBody>
@@ -4222,102 +7756,14 @@
       <p:grpSpPr/>
       <p:sp>
         <p:nvSpPr>
-          <p:cNvPr id="2" name="Rectangle 1"/>
+          <p:cNvPr id="2" name="Oval 1"/>
           <p:cNvSpPr/>
           <p:nvPr/>
         </p:nvSpPr>
         <p:spPr>
           <a:xfrm>
-            <a:off x="0" y="0"/>
-            <a:ext cx="12191695" cy="6858000"/>
-          </a:xfrm>
-          <a:prstGeom prst="rect">
-            <a:avLst/>
-          </a:prstGeom>
-          <a:solidFill>
-            <a:srgbClr val="102A43"/>
-          </a:solidFill>
-          <a:ln>
-            <a:noFill/>
-          </a:ln>
-          <a:effectLst/>
-        </p:spPr>
-        <p:style>
-          <a:lnRef idx="1">
-            <a:schemeClr val="accent1"/>
-          </a:lnRef>
-          <a:fillRef idx="3">
-            <a:schemeClr val="accent1"/>
-          </a:fillRef>
-          <a:effectRef idx="2">
-            <a:schemeClr val="accent1"/>
-          </a:effectRef>
-          <a:fontRef idx="minor">
-            <a:schemeClr val="lt1"/>
-          </a:fontRef>
-        </p:style>
-        <p:txBody>
-          <a:bodyPr rtlCol="0" anchor="ctr"/>
-          <a:lstStyle/>
-          <a:p>
-            <a:pPr algn="ctr"/>
-          </a:p>
-        </p:txBody>
-      </p:sp>
-      <p:sp>
-        <p:nvSpPr>
-          <p:cNvPr id="3" name="Oval 2"/>
-          <p:cNvSpPr/>
-          <p:nvPr/>
-        </p:nvSpPr>
-        <p:spPr>
-          <a:xfrm>
-            <a:off x="-1280160" y="-1463040"/>
-            <a:ext cx="4114800" cy="4114800"/>
-          </a:xfrm>
-          <a:prstGeom prst="ellipse">
-            <a:avLst/>
-          </a:prstGeom>
-          <a:solidFill>
-            <a:srgbClr val="0A1F33"/>
-          </a:solidFill>
-          <a:ln>
-            <a:noFill/>
-          </a:ln>
-          <a:effectLst/>
-        </p:spPr>
-        <p:style>
-          <a:lnRef idx="1">
-            <a:schemeClr val="accent1"/>
-          </a:lnRef>
-          <a:fillRef idx="3">
-            <a:schemeClr val="accent1"/>
-          </a:fillRef>
-          <a:effectRef idx="2">
-            <a:schemeClr val="accent1"/>
-          </a:effectRef>
-          <a:fontRef idx="minor">
-            <a:schemeClr val="lt1"/>
-          </a:fontRef>
-        </p:style>
-        <p:txBody>
-          <a:bodyPr rtlCol="0" anchor="ctr"/>
-          <a:lstStyle/>
-          <a:p>
-            <a:pPr algn="ctr"/>
-          </a:p>
-        </p:txBody>
-      </p:sp>
-      <p:sp>
-        <p:nvSpPr>
-          <p:cNvPr id="4" name="Oval 3"/>
-          <p:cNvSpPr/>
-          <p:nvPr/>
-        </p:nvSpPr>
-        <p:spPr>
-          <a:xfrm>
-            <a:off x="5175504" y="822960"/>
-            <a:ext cx="1828800" cy="1828800"/>
+            <a:off x="548640" y="502920"/>
+            <a:ext cx="502920" cy="502920"/>
           </a:xfrm>
           <a:prstGeom prst="ellipse">
             <a:avLst/>
@@ -4354,14 +7800,14 @@
       </p:sp>
       <p:sp>
         <p:nvSpPr>
-          <p:cNvPr id="5" name="TextBox 4"/>
+          <p:cNvPr id="3" name="TextBox 2"/>
           <p:cNvSpPr txBox="1"/>
           <p:nvPr/>
         </p:nvSpPr>
         <p:spPr>
           <a:xfrm>
-            <a:off x="5175504" y="822960"/>
-            <a:ext cx="1828800" cy="1828800"/>
+            <a:off x="548640" y="502920"/>
+            <a:ext cx="502920" cy="502920"/>
           </a:xfrm>
           <a:prstGeom prst="rect">
             <a:avLst/>
@@ -4376,27 +7822,27 @@
           <a:p>
             <a:pPr algn="ctr"/>
             <a:r>
-              <a:rPr sz="4400" b="1">
+              <a:rPr sz="2000" b="0">
                 <a:solidFill>
                   <a:srgbClr val="0A1F33"/>
                 </a:solidFill>
                 <a:latin typeface="Calibri"/>
               </a:rPr>
-              <a:t>✔</a:t>
-            </a:r>
-          </a:p>
-        </p:txBody>
-      </p:sp>
-      <p:sp>
-        <p:nvSpPr>
-          <p:cNvPr id="6" name="TextBox 5"/>
+              <a:t>⚖</a:t>
+            </a:r>
+          </a:p>
+        </p:txBody>
+      </p:sp>
+      <p:sp>
+        <p:nvSpPr>
+          <p:cNvPr id="4" name="TextBox 3"/>
           <p:cNvSpPr txBox="1"/>
           <p:nvPr/>
         </p:nvSpPr>
         <p:spPr>
           <a:xfrm>
-            <a:off x="548640" y="2880360"/>
-            <a:ext cx="11064240" cy="457200"/>
+            <a:off x="1234440" y="530352"/>
+            <a:ext cx="9144000" cy="457200"/>
           </a:xfrm>
           <a:prstGeom prst="rect">
             <a:avLst/>
@@ -4409,29 +7855,28 @@
           </a:bodyPr>
           <a:lstStyle/>
           <a:p>
-            <a:pPr algn="ctr"/>
             <a:r>
               <a:rPr sz="1400" b="1">
                 <a:solidFill>
-                  <a:srgbClr val="F0B429"/>
+                  <a:srgbClr val="DE911D"/>
                 </a:solidFill>
                 <a:latin typeface="Calibri"/>
               </a:rPr>
-              <a:t>PRÁCTICA — CONSTRUCCIÓN DE UN CUADRO DE EMPAREJAMIENTO</a:t>
-            </a:r>
-          </a:p>
-        </p:txBody>
-      </p:sp>
-      <p:sp>
-        <p:nvSpPr>
-          <p:cNvPr id="7" name="TextBox 6"/>
+              <a:t>CONTENIDO PARA VER EN CLASE</a:t>
+            </a:r>
+          </a:p>
+        </p:txBody>
+      </p:sp>
+      <p:sp>
+        <p:nvSpPr>
+          <p:cNvPr id="5" name="TextBox 4"/>
           <p:cNvSpPr txBox="1"/>
           <p:nvPr/>
         </p:nvSpPr>
         <p:spPr>
           <a:xfrm>
-            <a:off x="1280160" y="3383280"/>
-            <a:ext cx="9601200" cy="2377440"/>
+            <a:off x="548640" y="1051560"/>
+            <a:ext cx="11064240" cy="822960"/>
           </a:xfrm>
           <a:prstGeom prst="rect">
             <a:avLst/>
@@ -4444,29 +7889,72 @@
           </a:bodyPr>
           <a:lstStyle/>
           <a:p>
+            <a:r>
+              <a:rPr sz="2600" b="1">
+                <a:solidFill>
+                  <a:srgbClr val="0A1F33"/>
+                </a:solidFill>
+                <a:latin typeface="Cambria"/>
+              </a:rPr>
+              <a:t>La lista inicial y la primera ronda</a:t>
+            </a:r>
+          </a:p>
+        </p:txBody>
+      </p:sp>
+      <p:sp>
+        <p:nvSpPr>
+          <p:cNvPr id="6" name="Rectangle 5"/>
+          <p:cNvSpPr/>
+          <p:nvPr/>
+        </p:nvSpPr>
+        <p:spPr>
+          <a:xfrm>
+            <a:off x="548640" y="1874519"/>
+            <a:ext cx="11064240" cy="4389120"/>
+          </a:xfrm>
+          <a:prstGeom prst="rect">
+            <a:avLst/>
+          </a:prstGeom>
+          <a:solidFill>
+            <a:srgbClr val="F0F4F8"/>
+          </a:solidFill>
+          <a:ln>
+            <a:noFill/>
+          </a:ln>
+          <a:effectLst/>
+        </p:spPr>
+        <p:style>
+          <a:lnRef idx="1">
+            <a:schemeClr val="accent1"/>
+          </a:lnRef>
+          <a:fillRef idx="3">
+            <a:schemeClr val="accent1"/>
+          </a:fillRef>
+          <a:effectRef idx="2">
+            <a:schemeClr val="accent1"/>
+          </a:effectRef>
+          <a:fontRef idx="minor">
+            <a:schemeClr val="lt1"/>
+          </a:fontRef>
+        </p:style>
+        <p:txBody>
+          <a:bodyPr rtlCol="0" anchor="ctr"/>
+          <a:lstStyle/>
+          <a:p>
             <a:pPr algn="ctr"/>
-            <a:r>
-              <a:rPr sz="2000" b="0">
-                <a:solidFill>
-                  <a:srgbClr val="FFFFFF"/>
-                </a:solidFill>
-                <a:latin typeface="Cambria"/>
-              </a:rPr>
-              <a:t>Con una lista de 12 jugadores ficticios, cada participante construye la primera ronda bajo sistema suizo y, luego, la calendarización equivalente en round robin.</a:t>
-            </a:r>
-          </a:p>
-        </p:txBody>
-      </p:sp>
-      <p:sp>
-        <p:nvSpPr>
-          <p:cNvPr id="8" name="TextBox 7"/>
+          </a:p>
+        </p:txBody>
+      </p:sp>
+      <p:sp>
+        <p:nvSpPr>
+          <p:cNvPr id="7" name="TextBox 6"/>
           <p:cNvSpPr txBox="1"/>
           <p:nvPr/>
         </p:nvSpPr>
         <p:spPr>
           <a:xfrm>
-            <a:off x="548640" y="6263640"/>
-            <a:ext cx="11064240" cy="365760"/>
+            <a:off x="914400" y="2011680"/>
+            <a:ext cx="10332720" cy="1371600"/>
           </a:xfrm>
           <a:prstGeom prst="rect">
             <a:avLst/>
@@ -4479,15 +7967,1470 @@
           </a:bodyPr>
           <a:lstStyle/>
           <a:p>
+            <a:r>
+              <a:rPr sz="1300" b="0">
+                <a:solidFill>
+                  <a:srgbClr val="0A1F33"/>
+                </a:solidFill>
+                <a:latin typeface="Calibri"/>
+              </a:rPr>
+              <a:t>Antes de la primera ronda se ordena a los jugadores por rating, de mayor a menor, con criterios para los empates (en torneos escolares sin rating, suele usarse el orden alfabético o un sorteo que el reglamento anuncia). Ese número de orden acompaña al jugador todo el torneo. En la primera ronda se divide la lista en dos mitades y la superior juega contra la inferior.</a:t>
+            </a:r>
+          </a:p>
+        </p:txBody>
+      </p:sp>
+      <p:sp>
+        <p:nvSpPr>
+          <p:cNvPr id="8" name="TextBox 7"/>
+          <p:cNvSpPr txBox="1"/>
+          <p:nvPr/>
+        </p:nvSpPr>
+        <p:spPr>
+          <a:xfrm>
+            <a:off x="914400" y="3429000"/>
+            <a:ext cx="10332720" cy="2743200"/>
+          </a:xfrm>
+          <a:prstGeom prst="rect">
+            <a:avLst/>
+          </a:prstGeom>
+          <a:noFill/>
+        </p:spPr>
+        <p:txBody>
+          <a:bodyPr wrap="square">
+            <a:spAutoFit/>
+          </a:bodyPr>
+          <a:lstStyle/>
+          <a:p>
+            <a:pPr>
+              <a:spcAft>
+                <a:spcPts val="800"/>
+              </a:spcAft>
+            </a:pPr>
+            <a:r>
+              <a:rPr sz="1500">
+                <a:solidFill>
+                  <a:srgbClr val="334E68"/>
+                </a:solidFill>
+                <a:latin typeface="Calibri"/>
+              </a:rPr>
+              <a:t>•  Con 12 jugadores: 1–7, 2–8, 3–9, 4–10, 5–11 y 6–12.</a:t>
+            </a:r>
+          </a:p>
+          <a:p>
+            <a:pPr>
+              <a:spcAft>
+                <a:spcPts val="800"/>
+              </a:spcAft>
+            </a:pPr>
+            <a:r>
+              <a:rPr sz="1500">
+                <a:solidFill>
+                  <a:srgbClr val="334E68"/>
+                </a:solidFill>
+                <a:latin typeface="Calibri"/>
+              </a:rPr>
+              <a:t>•  El color del número 1 se sortea y se alterna tablero a tablero: si el 1 lleva blancas, el 2 lleva negras, el 3 blancas, y así.</a:t>
+            </a:r>
+          </a:p>
+          <a:p>
+            <a:pPr>
+              <a:spcAft>
+                <a:spcPts val="800"/>
+              </a:spcAft>
+            </a:pPr>
+            <a:r>
+              <a:rPr sz="1500">
+                <a:solidFill>
+                  <a:srgbClr val="334E68"/>
+                </a:solidFill>
+                <a:latin typeface="Calibri"/>
+              </a:rPr>
+              <a:t>•  Resultado con el 1 de blancas: 1–7, 8–2, 3–9, 10–4, 5–11, 12–6 (el primero de cada pareja lleva blancas).</a:t>
+            </a:r>
+          </a:p>
+        </p:txBody>
+      </p:sp>
+      <p:sp>
+        <p:nvSpPr>
+          <p:cNvPr id="9" name="TextBox 8"/>
+          <p:cNvSpPr txBox="1"/>
+          <p:nvPr/>
+        </p:nvSpPr>
+        <p:spPr>
+          <a:xfrm>
+            <a:off x="548640" y="6355080"/>
+            <a:ext cx="11064240" cy="365760"/>
+          </a:xfrm>
+          <a:prstGeom prst="rect">
+            <a:avLst/>
+          </a:prstGeom>
+          <a:noFill/>
+        </p:spPr>
+        <p:txBody>
+          <a:bodyPr wrap="square">
+            <a:spAutoFit/>
+          </a:bodyPr>
+          <a:lstStyle/>
+          <a:p>
+            <a:r>
+              <a:rPr sz="1100" b="0">
+                <a:solidFill>
+                  <a:srgbClr val="627D98"/>
+                </a:solidFill>
+                <a:latin typeface="Calibri"/>
+              </a:rPr>
+              <a:t>Fuente: Reglas generales de manejo del sistema suizo (Handbook C.04.2) y Sistema holandés de la FIDE (Handbook C.04.3)</a:t>
+            </a:r>
+          </a:p>
+        </p:txBody>
+      </p:sp>
+    </p:spTree>
+  </p:cSld>
+  <p:clrMapOvr>
+    <a:masterClrMapping/>
+  </p:clrMapOvr>
+</p:sld>
+</file>
+
+<file path=ppt/slides/slide6.xml><?xml version="1.0" encoding="utf-8"?>
+<p:sld xmlns:a="http://schemas.openxmlformats.org/drawingml/2006/main" xmlns:p="http://schemas.openxmlformats.org/presentationml/2006/main" xmlns:r="http://schemas.openxmlformats.org/officeDocument/2006/relationships">
+  <p:cSld>
+    <p:spTree>
+      <p:nvGrpSpPr>
+        <p:cNvPr id="1" name=""/>
+        <p:cNvGrpSpPr/>
+        <p:nvPr/>
+      </p:nvGrpSpPr>
+      <p:grpSpPr/>
+      <p:sp>
+        <p:nvSpPr>
+          <p:cNvPr id="2" name="Oval 1"/>
+          <p:cNvSpPr/>
+          <p:nvPr/>
+        </p:nvSpPr>
+        <p:spPr>
+          <a:xfrm>
+            <a:off x="548640" y="502920"/>
+            <a:ext cx="502920" cy="502920"/>
+          </a:xfrm>
+          <a:prstGeom prst="ellipse">
+            <a:avLst/>
+          </a:prstGeom>
+          <a:solidFill>
+            <a:srgbClr val="DE911D"/>
+          </a:solidFill>
+          <a:ln>
+            <a:noFill/>
+          </a:ln>
+          <a:effectLst/>
+        </p:spPr>
+        <p:style>
+          <a:lnRef idx="1">
+            <a:schemeClr val="accent1"/>
+          </a:lnRef>
+          <a:fillRef idx="3">
+            <a:schemeClr val="accent1"/>
+          </a:fillRef>
+          <a:effectRef idx="2">
+            <a:schemeClr val="accent1"/>
+          </a:effectRef>
+          <a:fontRef idx="minor">
+            <a:schemeClr val="lt1"/>
+          </a:fontRef>
+        </p:style>
+        <p:txBody>
+          <a:bodyPr rtlCol="0" anchor="ctr"/>
+          <a:lstStyle/>
+          <a:p>
             <a:pPr algn="ctr"/>
-            <a:r>
-              <a:rPr sz="1200" b="0">
-                <a:solidFill>
-                  <a:srgbClr val="9FB3C8"/>
+          </a:p>
+        </p:txBody>
+      </p:sp>
+      <p:sp>
+        <p:nvSpPr>
+          <p:cNvPr id="3" name="TextBox 2"/>
+          <p:cNvSpPr txBox="1"/>
+          <p:nvPr/>
+        </p:nvSpPr>
+        <p:spPr>
+          <a:xfrm>
+            <a:off x="548640" y="502920"/>
+            <a:ext cx="502920" cy="502920"/>
+          </a:xfrm>
+          <a:prstGeom prst="rect">
+            <a:avLst/>
+          </a:prstGeom>
+          <a:noFill/>
+        </p:spPr>
+        <p:txBody>
+          <a:bodyPr wrap="square">
+            <a:spAutoFit/>
+          </a:bodyPr>
+          <a:lstStyle/>
+          <a:p>
+            <a:pPr algn="ctr"/>
+            <a:r>
+              <a:rPr sz="2000" b="0">
+                <a:solidFill>
+                  <a:srgbClr val="0A1F33"/>
                 </a:solidFill>
                 <a:latin typeface="Calibri"/>
               </a:rPr>
-              <a:t>Formación Ajedrez · Sesión 4</a:t>
+              <a:t>⚖</a:t>
+            </a:r>
+          </a:p>
+        </p:txBody>
+      </p:sp>
+      <p:sp>
+        <p:nvSpPr>
+          <p:cNvPr id="4" name="TextBox 3"/>
+          <p:cNvSpPr txBox="1"/>
+          <p:nvPr/>
+        </p:nvSpPr>
+        <p:spPr>
+          <a:xfrm>
+            <a:off x="1234440" y="530352"/>
+            <a:ext cx="9144000" cy="457200"/>
+          </a:xfrm>
+          <a:prstGeom prst="rect">
+            <a:avLst/>
+          </a:prstGeom>
+          <a:noFill/>
+        </p:spPr>
+        <p:txBody>
+          <a:bodyPr wrap="square">
+            <a:spAutoFit/>
+          </a:bodyPr>
+          <a:lstStyle/>
+          <a:p>
+            <a:r>
+              <a:rPr sz="1400" b="1">
+                <a:solidFill>
+                  <a:srgbClr val="DE911D"/>
+                </a:solidFill>
+                <a:latin typeface="Calibri"/>
+              </a:rPr>
+              <a:t>CONTENIDO PARA VER EN CLASE</a:t>
+            </a:r>
+          </a:p>
+        </p:txBody>
+      </p:sp>
+      <p:sp>
+        <p:nvSpPr>
+          <p:cNvPr id="5" name="TextBox 4"/>
+          <p:cNvSpPr txBox="1"/>
+          <p:nvPr/>
+        </p:nvSpPr>
+        <p:spPr>
+          <a:xfrm>
+            <a:off x="548640" y="1051560"/>
+            <a:ext cx="11064240" cy="822960"/>
+          </a:xfrm>
+          <a:prstGeom prst="rect">
+            <a:avLst/>
+          </a:prstGeom>
+          <a:noFill/>
+        </p:spPr>
+        <p:txBody>
+          <a:bodyPr wrap="square">
+            <a:spAutoFit/>
+          </a:bodyPr>
+          <a:lstStyle/>
+          <a:p>
+            <a:r>
+              <a:rPr sz="2600" b="1">
+                <a:solidFill>
+                  <a:srgbClr val="0A1F33"/>
+                </a:solidFill>
+                <a:latin typeface="Cambria"/>
+              </a:rPr>
+              <a:t>Las rondas siguientes</a:t>
+            </a:r>
+          </a:p>
+        </p:txBody>
+      </p:sp>
+      <p:sp>
+        <p:nvSpPr>
+          <p:cNvPr id="6" name="Rectangle 5"/>
+          <p:cNvSpPr/>
+          <p:nvPr/>
+        </p:nvSpPr>
+        <p:spPr>
+          <a:xfrm>
+            <a:off x="548640" y="1874519"/>
+            <a:ext cx="11064240" cy="4389120"/>
+          </a:xfrm>
+          <a:prstGeom prst="rect">
+            <a:avLst/>
+          </a:prstGeom>
+          <a:solidFill>
+            <a:srgbClr val="F0F4F8"/>
+          </a:solidFill>
+          <a:ln>
+            <a:noFill/>
+          </a:ln>
+          <a:effectLst/>
+        </p:spPr>
+        <p:style>
+          <a:lnRef idx="1">
+            <a:schemeClr val="accent1"/>
+          </a:lnRef>
+          <a:fillRef idx="3">
+            <a:schemeClr val="accent1"/>
+          </a:fillRef>
+          <a:effectRef idx="2">
+            <a:schemeClr val="accent1"/>
+          </a:effectRef>
+          <a:fontRef idx="minor">
+            <a:schemeClr val="lt1"/>
+          </a:fontRef>
+        </p:style>
+        <p:txBody>
+          <a:bodyPr rtlCol="0" anchor="ctr"/>
+          <a:lstStyle/>
+          <a:p>
+            <a:pPr algn="ctr"/>
+          </a:p>
+        </p:txBody>
+      </p:sp>
+      <p:sp>
+        <p:nvSpPr>
+          <p:cNvPr id="7" name="TextBox 6"/>
+          <p:cNvSpPr txBox="1"/>
+          <p:nvPr/>
+        </p:nvSpPr>
+        <p:spPr>
+          <a:xfrm>
+            <a:off x="914400" y="2011680"/>
+            <a:ext cx="10332720" cy="1371600"/>
+          </a:xfrm>
+          <a:prstGeom prst="rect">
+            <a:avLst/>
+          </a:prstGeom>
+          <a:noFill/>
+        </p:spPr>
+        <p:txBody>
+          <a:bodyPr wrap="square">
+            <a:spAutoFit/>
+          </a:bodyPr>
+          <a:lstStyle/>
+          <a:p>
+            <a:r>
+              <a:rPr sz="1500" b="0">
+                <a:solidFill>
+                  <a:srgbClr val="0A1F33"/>
+                </a:solidFill>
+                <a:latin typeface="Calibri"/>
+              </a:rPr>
+              <a:t>Desde la segunda ronda se forman grupos de puntuación. Dentro de cada grupo, ordenado por el número inicial, se cruza la mitad superior con la inferior, respetando los colores y la prohibición de repetir rival. Quien no se puede emparejar en su grupo baja al siguiente como flotante.</a:t>
+            </a:r>
+          </a:p>
+        </p:txBody>
+      </p:sp>
+      <p:sp>
+        <p:nvSpPr>
+          <p:cNvPr id="8" name="TextBox 7"/>
+          <p:cNvSpPr txBox="1"/>
+          <p:nvPr/>
+        </p:nvSpPr>
+        <p:spPr>
+          <a:xfrm>
+            <a:off x="914400" y="3429000"/>
+            <a:ext cx="10332720" cy="2743200"/>
+          </a:xfrm>
+          <a:prstGeom prst="rect">
+            <a:avLst/>
+          </a:prstGeom>
+          <a:noFill/>
+        </p:spPr>
+        <p:txBody>
+          <a:bodyPr wrap="square">
+            <a:spAutoFit/>
+          </a:bodyPr>
+          <a:lstStyle/>
+          <a:p>
+            <a:pPr>
+              <a:spcAft>
+                <a:spcPts val="800"/>
+              </a:spcAft>
+            </a:pPr>
+            <a:r>
+              <a:rPr sz="1100">
+                <a:solidFill>
+                  <a:srgbClr val="334E68"/>
+                </a:solidFill>
+                <a:latin typeface="Calibri"/>
+              </a:rPr>
+              <a:t>•  Una vez publicado, el emparejamiento solo se cambia si hace jugar dos veces al mismo par.</a:t>
+            </a:r>
+          </a:p>
+          <a:p>
+            <a:pPr>
+              <a:spcAft>
+                <a:spcPts val="800"/>
+              </a:spcAft>
+            </a:pPr>
+            <a:r>
+              <a:rPr sz="1100">
+                <a:solidFill>
+                  <a:srgbClr val="334E68"/>
+                </a:solidFill>
+                <a:latin typeface="Calibri"/>
+              </a:rPr>
+              <a:t>•  A quien se sabe que no jugará una ronda no se le empareja y anota cero, salvo que el reglamento prevea otra cosa (por ejemplo, medio punto por descanso solicitado).</a:t>
+            </a:r>
+          </a:p>
+          <a:p>
+            <a:pPr>
+              <a:spcAft>
+                <a:spcPts val="800"/>
+              </a:spcAft>
+            </a:pPr>
+            <a:r>
+              <a:rPr sz="1100">
+                <a:solidFill>
+                  <a:srgbClr val="334E68"/>
+                </a:solidFill>
+                <a:latin typeface="Calibri"/>
+              </a:rPr>
+              <a:t>•  Quien falta sin avisar se considera retirado, salvo que explique su ausencia antes del siguiente emparejamiento.</a:t>
+            </a:r>
+          </a:p>
+          <a:p>
+            <a:pPr>
+              <a:spcAft>
+                <a:spcPts val="800"/>
+              </a:spcAft>
+            </a:pPr>
+            <a:r>
+              <a:rPr sz="1100">
+                <a:solidFill>
+                  <a:srgbClr val="334E68"/>
+                </a:solidFill>
+                <a:latin typeface="Calibri"/>
+              </a:rPr>
+              <a:t>•  Está prohibido alterar el emparejamiento correcto para favorecer a alguien.</a:t>
+            </a:r>
+          </a:p>
+          <a:p>
+            <a:pPr>
+              <a:spcAft>
+                <a:spcPts val="800"/>
+              </a:spcAft>
+            </a:pPr>
+            <a:r>
+              <a:rPr sz="1100">
+                <a:solidFill>
+                  <a:srgbClr val="334E68"/>
+                </a:solidFill>
+                <a:latin typeface="Calibri"/>
+              </a:rPr>
+              <a:t>•  En la práctica se usa un programa de emparejamiento reconocido por la FIDE; quien arbitra debe entender lo que hace para poder revisarlo.</a:t>
+            </a:r>
+          </a:p>
+        </p:txBody>
+      </p:sp>
+      <p:sp>
+        <p:nvSpPr>
+          <p:cNvPr id="9" name="TextBox 8"/>
+          <p:cNvSpPr txBox="1"/>
+          <p:nvPr/>
+        </p:nvSpPr>
+        <p:spPr>
+          <a:xfrm>
+            <a:off x="548640" y="6355080"/>
+            <a:ext cx="11064240" cy="365760"/>
+          </a:xfrm>
+          <a:prstGeom prst="rect">
+            <a:avLst/>
+          </a:prstGeom>
+          <a:noFill/>
+        </p:spPr>
+        <p:txBody>
+          <a:bodyPr wrap="square">
+            <a:spAutoFit/>
+          </a:bodyPr>
+          <a:lstStyle/>
+          <a:p>
+            <a:r>
+              <a:rPr sz="1100" b="0">
+                <a:solidFill>
+                  <a:srgbClr val="627D98"/>
+                </a:solidFill>
+                <a:latin typeface="Calibri"/>
+              </a:rPr>
+              <a:t>Fuente: Reglas generales de manejo del sistema suizo (Handbook C.04.2) y Sistema holandés de la FIDE (Handbook C.04.3)</a:t>
+            </a:r>
+          </a:p>
+        </p:txBody>
+      </p:sp>
+    </p:spTree>
+  </p:cSld>
+  <p:clrMapOvr>
+    <a:masterClrMapping/>
+  </p:clrMapOvr>
+</p:sld>
+</file>
+
+<file path=ppt/slides/slide7.xml><?xml version="1.0" encoding="utf-8"?>
+<p:sld xmlns:a="http://schemas.openxmlformats.org/drawingml/2006/main" xmlns:p="http://schemas.openxmlformats.org/presentationml/2006/main" xmlns:r="http://schemas.openxmlformats.org/officeDocument/2006/relationships">
+  <p:cSld>
+    <p:spTree>
+      <p:nvGrpSpPr>
+        <p:cNvPr id="1" name=""/>
+        <p:cNvGrpSpPr/>
+        <p:nvPr/>
+      </p:nvGrpSpPr>
+      <p:grpSpPr/>
+      <p:sp>
+        <p:nvSpPr>
+          <p:cNvPr id="2" name="Oval 1"/>
+          <p:cNvSpPr/>
+          <p:nvPr/>
+        </p:nvSpPr>
+        <p:spPr>
+          <a:xfrm>
+            <a:off x="548640" y="502920"/>
+            <a:ext cx="502920" cy="502920"/>
+          </a:xfrm>
+          <a:prstGeom prst="ellipse">
+            <a:avLst/>
+          </a:prstGeom>
+          <a:solidFill>
+            <a:srgbClr val="DE911D"/>
+          </a:solidFill>
+          <a:ln>
+            <a:noFill/>
+          </a:ln>
+          <a:effectLst/>
+        </p:spPr>
+        <p:style>
+          <a:lnRef idx="1">
+            <a:schemeClr val="accent1"/>
+          </a:lnRef>
+          <a:fillRef idx="3">
+            <a:schemeClr val="accent1"/>
+          </a:fillRef>
+          <a:effectRef idx="2">
+            <a:schemeClr val="accent1"/>
+          </a:effectRef>
+          <a:fontRef idx="minor">
+            <a:schemeClr val="lt1"/>
+          </a:fontRef>
+        </p:style>
+        <p:txBody>
+          <a:bodyPr rtlCol="0" anchor="ctr"/>
+          <a:lstStyle/>
+          <a:p>
+            <a:pPr algn="ctr"/>
+          </a:p>
+        </p:txBody>
+      </p:sp>
+      <p:sp>
+        <p:nvSpPr>
+          <p:cNvPr id="3" name="TextBox 2"/>
+          <p:cNvSpPr txBox="1"/>
+          <p:nvPr/>
+        </p:nvSpPr>
+        <p:spPr>
+          <a:xfrm>
+            <a:off x="548640" y="502920"/>
+            <a:ext cx="502920" cy="502920"/>
+          </a:xfrm>
+          <a:prstGeom prst="rect">
+            <a:avLst/>
+          </a:prstGeom>
+          <a:noFill/>
+        </p:spPr>
+        <p:txBody>
+          <a:bodyPr wrap="square">
+            <a:spAutoFit/>
+          </a:bodyPr>
+          <a:lstStyle/>
+          <a:p>
+            <a:pPr algn="ctr"/>
+            <a:r>
+              <a:rPr sz="2000" b="0">
+                <a:solidFill>
+                  <a:srgbClr val="0A1F33"/>
+                </a:solidFill>
+                <a:latin typeface="Calibri"/>
+              </a:rPr>
+              <a:t>⚖</a:t>
+            </a:r>
+          </a:p>
+        </p:txBody>
+      </p:sp>
+      <p:sp>
+        <p:nvSpPr>
+          <p:cNvPr id="4" name="TextBox 3"/>
+          <p:cNvSpPr txBox="1"/>
+          <p:nvPr/>
+        </p:nvSpPr>
+        <p:spPr>
+          <a:xfrm>
+            <a:off x="1234440" y="530352"/>
+            <a:ext cx="9144000" cy="457200"/>
+          </a:xfrm>
+          <a:prstGeom prst="rect">
+            <a:avLst/>
+          </a:prstGeom>
+          <a:noFill/>
+        </p:spPr>
+        <p:txBody>
+          <a:bodyPr wrap="square">
+            <a:spAutoFit/>
+          </a:bodyPr>
+          <a:lstStyle/>
+          <a:p>
+            <a:r>
+              <a:rPr sz="1400" b="1">
+                <a:solidFill>
+                  <a:srgbClr val="DE911D"/>
+                </a:solidFill>
+                <a:latin typeface="Calibri"/>
+              </a:rPr>
+              <a:t>CONTENIDO PARA VER EN CLASE</a:t>
+            </a:r>
+          </a:p>
+        </p:txBody>
+      </p:sp>
+      <p:sp>
+        <p:nvSpPr>
+          <p:cNvPr id="5" name="TextBox 4"/>
+          <p:cNvSpPr txBox="1"/>
+          <p:nvPr/>
+        </p:nvSpPr>
+        <p:spPr>
+          <a:xfrm>
+            <a:off x="548640" y="1051560"/>
+            <a:ext cx="11064240" cy="822960"/>
+          </a:xfrm>
+          <a:prstGeom prst="rect">
+            <a:avLst/>
+          </a:prstGeom>
+          <a:noFill/>
+        </p:spPr>
+        <p:txBody>
+          <a:bodyPr wrap="square">
+            <a:spAutoFit/>
+          </a:bodyPr>
+          <a:lstStyle/>
+          <a:p>
+            <a:r>
+              <a:rPr sz="2600" b="1">
+                <a:solidFill>
+                  <a:srgbClr val="0A1F33"/>
+                </a:solidFill>
+                <a:latin typeface="Cambria"/>
+              </a:rPr>
+              <a:t>Todos contra todos (round robin)</a:t>
+            </a:r>
+          </a:p>
+        </p:txBody>
+      </p:sp>
+      <p:sp>
+        <p:nvSpPr>
+          <p:cNvPr id="6" name="Rectangle 5"/>
+          <p:cNvSpPr/>
+          <p:nvPr/>
+        </p:nvSpPr>
+        <p:spPr>
+          <a:xfrm>
+            <a:off x="548640" y="1874519"/>
+            <a:ext cx="11064240" cy="4389120"/>
+          </a:xfrm>
+          <a:prstGeom prst="rect">
+            <a:avLst/>
+          </a:prstGeom>
+          <a:solidFill>
+            <a:srgbClr val="F0F4F8"/>
+          </a:solidFill>
+          <a:ln>
+            <a:noFill/>
+          </a:ln>
+          <a:effectLst/>
+        </p:spPr>
+        <p:style>
+          <a:lnRef idx="1">
+            <a:schemeClr val="accent1"/>
+          </a:lnRef>
+          <a:fillRef idx="3">
+            <a:schemeClr val="accent1"/>
+          </a:fillRef>
+          <a:effectRef idx="2">
+            <a:schemeClr val="accent1"/>
+          </a:effectRef>
+          <a:fontRef idx="minor">
+            <a:schemeClr val="lt1"/>
+          </a:fontRef>
+        </p:style>
+        <p:txBody>
+          <a:bodyPr rtlCol="0" anchor="ctr"/>
+          <a:lstStyle/>
+          <a:p>
+            <a:pPr algn="ctr"/>
+          </a:p>
+        </p:txBody>
+      </p:sp>
+      <p:sp>
+        <p:nvSpPr>
+          <p:cNvPr id="7" name="TextBox 6"/>
+          <p:cNvSpPr txBox="1"/>
+          <p:nvPr/>
+        </p:nvSpPr>
+        <p:spPr>
+          <a:xfrm>
+            <a:off x="914400" y="2011680"/>
+            <a:ext cx="10332720" cy="1371600"/>
+          </a:xfrm>
+          <a:prstGeom prst="rect">
+            <a:avLst/>
+          </a:prstGeom>
+          <a:noFill/>
+        </p:spPr>
+        <p:txBody>
+          <a:bodyPr wrap="square">
+            <a:spAutoFit/>
+          </a:bodyPr>
+          <a:lstStyle/>
+          <a:p>
+            <a:r>
+              <a:rPr sz="1500" b="0">
+                <a:solidFill>
+                  <a:srgbClr val="0A1F33"/>
+                </a:solidFill>
+                <a:latin typeface="Calibri"/>
+              </a:rPr>
+              <a:t>Cada jugador se enfrenta una vez con todos los demás. Con n jugadores (n par) hay n - 1 rondas y n × (n - 1) / 2 partidas. Si n es impar, se agrega un «descanso» como jugador más y en cada ronda descansa quien le toque enfrentarlo. El orden de las partidas sale de las tablas de Berger.</a:t>
+            </a:r>
+          </a:p>
+        </p:txBody>
+      </p:sp>
+      <p:sp>
+        <p:nvSpPr>
+          <p:cNvPr id="8" name="TextBox 7"/>
+          <p:cNvSpPr txBox="1"/>
+          <p:nvPr/>
+        </p:nvSpPr>
+        <p:spPr>
+          <a:xfrm>
+            <a:off x="914400" y="3429000"/>
+            <a:ext cx="10332720" cy="2743200"/>
+          </a:xfrm>
+          <a:prstGeom prst="rect">
+            <a:avLst/>
+          </a:prstGeom>
+          <a:noFill/>
+        </p:spPr>
+        <p:txBody>
+          <a:bodyPr wrap="square">
+            <a:spAutoFit/>
+          </a:bodyPr>
+          <a:lstStyle/>
+          <a:p>
+            <a:pPr>
+              <a:spcAft>
+                <a:spcPts val="800"/>
+              </a:spcAft>
+            </a:pPr>
+            <a:r>
+              <a:rPr sz="1500">
+                <a:solidFill>
+                  <a:srgbClr val="334E68"/>
+                </a:solidFill>
+                <a:latin typeface="Calibri"/>
+              </a:rPr>
+              <a:t>•  Tabla de Berger para 4 jugadores. Ronda 1: 1–4, 2–3. Ronda 2: 4–3, 1–2. Ronda 3: 2–4, 3–1.</a:t>
+            </a:r>
+          </a:p>
+          <a:p>
+            <a:pPr>
+              <a:spcAft>
+                <a:spcPts val="800"/>
+              </a:spcAft>
+            </a:pPr>
+            <a:r>
+              <a:rPr sz="1500">
+                <a:solidFill>
+                  <a:srgbClr val="334E68"/>
+                </a:solidFill>
+                <a:latin typeface="Calibri"/>
+              </a:rPr>
+              <a:t>•  Con 6 jugadores: 5 rondas y 15 partidas. Con 8: 7 rondas y 28 partidas.</a:t>
+            </a:r>
+          </a:p>
+          <a:p>
+            <a:pPr>
+              <a:spcAft>
+                <a:spcPts val="800"/>
+              </a:spcAft>
+            </a:pPr>
+            <a:r>
+              <a:rPr sz="1500">
+                <a:solidFill>
+                  <a:srgbClr val="334E68"/>
+                </a:solidFill>
+                <a:latin typeface="Calibri"/>
+              </a:rPr>
+              <a:t>•  Los números se sortean antes de empezar.</a:t>
+            </a:r>
+          </a:p>
+          <a:p>
+            <a:pPr>
+              <a:spcAft>
+                <a:spcPts val="800"/>
+              </a:spcAft>
+            </a:pPr>
+            <a:r>
+              <a:rPr sz="1500">
+                <a:solidFill>
+                  <a:srgbClr val="334E68"/>
+                </a:solidFill>
+                <a:latin typeface="Calibri"/>
+              </a:rPr>
+              <a:t>•  El desempate habitual es el Sonneborn-Berger, porque el Buchholz no distingue: todos enfrentaron a los mismos.</a:t>
+            </a:r>
+          </a:p>
+        </p:txBody>
+      </p:sp>
+      <p:sp>
+        <p:nvSpPr>
+          <p:cNvPr id="9" name="TextBox 8"/>
+          <p:cNvSpPr txBox="1"/>
+          <p:nvPr/>
+        </p:nvSpPr>
+        <p:spPr>
+          <a:xfrm>
+            <a:off x="548640" y="6355080"/>
+            <a:ext cx="11064240" cy="365760"/>
+          </a:xfrm>
+          <a:prstGeom prst="rect">
+            <a:avLst/>
+          </a:prstGeom>
+          <a:noFill/>
+        </p:spPr>
+        <p:txBody>
+          <a:bodyPr wrap="square">
+            <a:spAutoFit/>
+          </a:bodyPr>
+          <a:lstStyle/>
+          <a:p>
+            <a:r>
+              <a:rPr sz="1100" b="0">
+                <a:solidFill>
+                  <a:srgbClr val="627D98"/>
+                </a:solidFill>
+                <a:latin typeface="Calibri"/>
+              </a:rPr>
+              <a:t>Fuente: Tablas de Berger; Reglamento de desempates de la FIDE (Handbook C.07)</a:t>
+            </a:r>
+          </a:p>
+        </p:txBody>
+      </p:sp>
+    </p:spTree>
+  </p:cSld>
+  <p:clrMapOvr>
+    <a:masterClrMapping/>
+  </p:clrMapOvr>
+</p:sld>
+</file>
+
+<file path=ppt/slides/slide8.xml><?xml version="1.0" encoding="utf-8"?>
+<p:sld xmlns:a="http://schemas.openxmlformats.org/drawingml/2006/main" xmlns:p="http://schemas.openxmlformats.org/presentationml/2006/main" xmlns:r="http://schemas.openxmlformats.org/officeDocument/2006/relationships">
+  <p:cSld>
+    <p:spTree>
+      <p:nvGrpSpPr>
+        <p:cNvPr id="1" name=""/>
+        <p:cNvGrpSpPr/>
+        <p:nvPr/>
+      </p:nvGrpSpPr>
+      <p:grpSpPr/>
+      <p:sp>
+        <p:nvSpPr>
+          <p:cNvPr id="2" name="Oval 1"/>
+          <p:cNvSpPr/>
+          <p:nvPr/>
+        </p:nvSpPr>
+        <p:spPr>
+          <a:xfrm>
+            <a:off x="548640" y="502920"/>
+            <a:ext cx="502920" cy="502920"/>
+          </a:xfrm>
+          <a:prstGeom prst="ellipse">
+            <a:avLst/>
+          </a:prstGeom>
+          <a:solidFill>
+            <a:srgbClr val="DE911D"/>
+          </a:solidFill>
+          <a:ln>
+            <a:noFill/>
+          </a:ln>
+          <a:effectLst/>
+        </p:spPr>
+        <p:style>
+          <a:lnRef idx="1">
+            <a:schemeClr val="accent1"/>
+          </a:lnRef>
+          <a:fillRef idx="3">
+            <a:schemeClr val="accent1"/>
+          </a:fillRef>
+          <a:effectRef idx="2">
+            <a:schemeClr val="accent1"/>
+          </a:effectRef>
+          <a:fontRef idx="minor">
+            <a:schemeClr val="lt1"/>
+          </a:fontRef>
+        </p:style>
+        <p:txBody>
+          <a:bodyPr rtlCol="0" anchor="ctr"/>
+          <a:lstStyle/>
+          <a:p>
+            <a:pPr algn="ctr"/>
+          </a:p>
+        </p:txBody>
+      </p:sp>
+      <p:sp>
+        <p:nvSpPr>
+          <p:cNvPr id="3" name="TextBox 2"/>
+          <p:cNvSpPr txBox="1"/>
+          <p:nvPr/>
+        </p:nvSpPr>
+        <p:spPr>
+          <a:xfrm>
+            <a:off x="548640" y="502920"/>
+            <a:ext cx="502920" cy="502920"/>
+          </a:xfrm>
+          <a:prstGeom prst="rect">
+            <a:avLst/>
+          </a:prstGeom>
+          <a:noFill/>
+        </p:spPr>
+        <p:txBody>
+          <a:bodyPr wrap="square">
+            <a:spAutoFit/>
+          </a:bodyPr>
+          <a:lstStyle/>
+          <a:p>
+            <a:pPr algn="ctr"/>
+            <a:r>
+              <a:rPr sz="2000" b="0">
+                <a:solidFill>
+                  <a:srgbClr val="0A1F33"/>
+                </a:solidFill>
+                <a:latin typeface="Calibri"/>
+              </a:rPr>
+              <a:t>⚖</a:t>
+            </a:r>
+          </a:p>
+        </p:txBody>
+      </p:sp>
+      <p:sp>
+        <p:nvSpPr>
+          <p:cNvPr id="4" name="TextBox 3"/>
+          <p:cNvSpPr txBox="1"/>
+          <p:nvPr/>
+        </p:nvSpPr>
+        <p:spPr>
+          <a:xfrm>
+            <a:off x="1234440" y="530352"/>
+            <a:ext cx="9144000" cy="457200"/>
+          </a:xfrm>
+          <a:prstGeom prst="rect">
+            <a:avLst/>
+          </a:prstGeom>
+          <a:noFill/>
+        </p:spPr>
+        <p:txBody>
+          <a:bodyPr wrap="square">
+            <a:spAutoFit/>
+          </a:bodyPr>
+          <a:lstStyle/>
+          <a:p>
+            <a:r>
+              <a:rPr sz="1400" b="1">
+                <a:solidFill>
+                  <a:srgbClr val="DE911D"/>
+                </a:solidFill>
+                <a:latin typeface="Calibri"/>
+              </a:rPr>
+              <a:t>CONTENIDO PARA VER EN CLASE</a:t>
+            </a:r>
+          </a:p>
+        </p:txBody>
+      </p:sp>
+      <p:sp>
+        <p:nvSpPr>
+          <p:cNvPr id="5" name="TextBox 4"/>
+          <p:cNvSpPr txBox="1"/>
+          <p:nvPr/>
+        </p:nvSpPr>
+        <p:spPr>
+          <a:xfrm>
+            <a:off x="548640" y="1051560"/>
+            <a:ext cx="11064240" cy="822960"/>
+          </a:xfrm>
+          <a:prstGeom prst="rect">
+            <a:avLst/>
+          </a:prstGeom>
+          <a:noFill/>
+        </p:spPr>
+        <p:txBody>
+          <a:bodyPr wrap="square">
+            <a:spAutoFit/>
+          </a:bodyPr>
+          <a:lstStyle/>
+          <a:p>
+            <a:r>
+              <a:rPr sz="2600" b="1">
+                <a:solidFill>
+                  <a:srgbClr val="0A1F33"/>
+                </a:solidFill>
+                <a:latin typeface="Cambria"/>
+              </a:rPr>
+              <a:t>¿Suizo o todos contra todos?</a:t>
+            </a:r>
+          </a:p>
+        </p:txBody>
+      </p:sp>
+      <p:sp>
+        <p:nvSpPr>
+          <p:cNvPr id="6" name="Rectangle 5"/>
+          <p:cNvSpPr/>
+          <p:nvPr/>
+        </p:nvSpPr>
+        <p:spPr>
+          <a:xfrm>
+            <a:off x="548640" y="1874519"/>
+            <a:ext cx="11064240" cy="4389120"/>
+          </a:xfrm>
+          <a:prstGeom prst="rect">
+            <a:avLst/>
+          </a:prstGeom>
+          <a:solidFill>
+            <a:srgbClr val="F0F4F8"/>
+          </a:solidFill>
+          <a:ln>
+            <a:noFill/>
+          </a:ln>
+          <a:effectLst/>
+        </p:spPr>
+        <p:style>
+          <a:lnRef idx="1">
+            <a:schemeClr val="accent1"/>
+          </a:lnRef>
+          <a:fillRef idx="3">
+            <a:schemeClr val="accent1"/>
+          </a:fillRef>
+          <a:effectRef idx="2">
+            <a:schemeClr val="accent1"/>
+          </a:effectRef>
+          <a:fontRef idx="minor">
+            <a:schemeClr val="lt1"/>
+          </a:fontRef>
+        </p:style>
+        <p:txBody>
+          <a:bodyPr rtlCol="0" anchor="ctr"/>
+          <a:lstStyle/>
+          <a:p>
+            <a:pPr algn="ctr"/>
+          </a:p>
+        </p:txBody>
+      </p:sp>
+      <p:sp>
+        <p:nvSpPr>
+          <p:cNvPr id="7" name="TextBox 6"/>
+          <p:cNvSpPr txBox="1"/>
+          <p:nvPr/>
+        </p:nvSpPr>
+        <p:spPr>
+          <a:xfrm>
+            <a:off x="914400" y="2011680"/>
+            <a:ext cx="10332720" cy="1371600"/>
+          </a:xfrm>
+          <a:prstGeom prst="rect">
+            <a:avLst/>
+          </a:prstGeom>
+          <a:noFill/>
+        </p:spPr>
+        <p:txBody>
+          <a:bodyPr wrap="square">
+            <a:spAutoFit/>
+          </a:bodyPr>
+          <a:lstStyle/>
+          <a:p>
+            <a:r>
+              <a:rPr sz="1500" b="0">
+                <a:solidFill>
+                  <a:srgbClr val="0A1F33"/>
+                </a:solidFill>
+                <a:latin typeface="Calibri"/>
+              </a:rPr>
+              <a:t>La decisión depende de cuántas personas juegan, del tiempo disponible y del objetivo del torneo.</a:t>
+            </a:r>
+          </a:p>
+        </p:txBody>
+      </p:sp>
+      <p:sp>
+        <p:nvSpPr>
+          <p:cNvPr id="8" name="TextBox 7"/>
+          <p:cNvSpPr txBox="1"/>
+          <p:nvPr/>
+        </p:nvSpPr>
+        <p:spPr>
+          <a:xfrm>
+            <a:off x="914400" y="3429000"/>
+            <a:ext cx="10332720" cy="2743200"/>
+          </a:xfrm>
+          <a:prstGeom prst="rect">
+            <a:avLst/>
+          </a:prstGeom>
+          <a:noFill/>
+        </p:spPr>
+        <p:txBody>
+          <a:bodyPr wrap="square">
+            <a:spAutoFit/>
+          </a:bodyPr>
+          <a:lstStyle/>
+          <a:p>
+            <a:pPr>
+              <a:spcAft>
+                <a:spcPts val="800"/>
+              </a:spcAft>
+            </a:pPr>
+            <a:r>
+              <a:rPr sz="1300">
+                <a:solidFill>
+                  <a:srgbClr val="334E68"/>
+                </a:solidFill>
+                <a:latin typeface="Calibri"/>
+              </a:rPr>
+              <a:t>•  Pocos participantes (hasta 8 o 10) y tiempo suficiente: todos contra todos, que da la clasificación más justa.</a:t>
+            </a:r>
+          </a:p>
+          <a:p>
+            <a:pPr>
+              <a:spcAft>
+                <a:spcPts val="800"/>
+              </a:spcAft>
+            </a:pPr>
+            <a:r>
+              <a:rPr sz="1300">
+                <a:solidFill>
+                  <a:srgbClr val="334E68"/>
+                </a:solidFill>
+                <a:latin typeface="Calibri"/>
+              </a:rPr>
+              <a:t>•  Muchos participantes y pocas rondas posibles: suizo.</a:t>
+            </a:r>
+          </a:p>
+          <a:p>
+            <a:pPr>
+              <a:spcAft>
+                <a:spcPts val="800"/>
+              </a:spcAft>
+            </a:pPr>
+            <a:r>
+              <a:rPr sz="1300">
+                <a:solidFill>
+                  <a:srgbClr val="334E68"/>
+                </a:solidFill>
+                <a:latin typeface="Calibri"/>
+              </a:rPr>
+              <a:t>•  Regla práctica: con n jugadores, un suizo necesita al menos tantas rondas como veces hay que dividir n entre 2 para llegar a 1, y conviene sumar una o dos más para separar bien los primeros puestos.</a:t>
+            </a:r>
+          </a:p>
+          <a:p>
+            <a:pPr>
+              <a:spcAft>
+                <a:spcPts val="800"/>
+              </a:spcAft>
+            </a:pPr>
+            <a:r>
+              <a:rPr sz="1300">
+                <a:solidFill>
+                  <a:srgbClr val="334E68"/>
+                </a:solidFill>
+                <a:latin typeface="Calibri"/>
+              </a:rPr>
+              <a:t>•  Si el objetivo es clasificar a una etapa siguiente, las bases deben decir cuántos clasifican y con qué desempates.</a:t>
+            </a:r>
+          </a:p>
+        </p:txBody>
+      </p:sp>
+      <p:sp>
+        <p:nvSpPr>
+          <p:cNvPr id="9" name="TextBox 8"/>
+          <p:cNvSpPr txBox="1"/>
+          <p:nvPr/>
+        </p:nvSpPr>
+        <p:spPr>
+          <a:xfrm>
+            <a:off x="548640" y="6355080"/>
+            <a:ext cx="11064240" cy="365760"/>
+          </a:xfrm>
+          <a:prstGeom prst="rect">
+            <a:avLst/>
+          </a:prstGeom>
+          <a:noFill/>
+        </p:spPr>
+        <p:txBody>
+          <a:bodyPr wrap="square">
+            <a:spAutoFit/>
+          </a:bodyPr>
+          <a:lstStyle/>
+          <a:p>
+            <a:r>
+              <a:rPr sz="1100" b="0">
+                <a:solidFill>
+                  <a:srgbClr val="627D98"/>
+                </a:solidFill>
+                <a:latin typeface="Calibri"/>
+              </a:rPr>
+              <a:t>Fuente: Reglas básicas del sistema suizo (Handbook C.04.1)</a:t>
+            </a:r>
+          </a:p>
+        </p:txBody>
+      </p:sp>
+    </p:spTree>
+  </p:cSld>
+  <p:clrMapOvr>
+    <a:masterClrMapping/>
+  </p:clrMapOvr>
+</p:sld>
+</file>
+
+<file path=ppt/slides/slide9.xml><?xml version="1.0" encoding="utf-8"?>
+<p:sld xmlns:a="http://schemas.openxmlformats.org/drawingml/2006/main" xmlns:p="http://schemas.openxmlformats.org/presentationml/2006/main" xmlns:r="http://schemas.openxmlformats.org/officeDocument/2006/relationships">
+  <p:cSld>
+    <p:spTree>
+      <p:nvGrpSpPr>
+        <p:cNvPr id="1" name=""/>
+        <p:cNvGrpSpPr/>
+        <p:nvPr/>
+      </p:nvGrpSpPr>
+      <p:grpSpPr/>
+      <p:sp>
+        <p:nvSpPr>
+          <p:cNvPr id="2" name="Oval 1"/>
+          <p:cNvSpPr/>
+          <p:nvPr/>
+        </p:nvSpPr>
+        <p:spPr>
+          <a:xfrm>
+            <a:off x="548640" y="502920"/>
+            <a:ext cx="502920" cy="502920"/>
+          </a:xfrm>
+          <a:prstGeom prst="ellipse">
+            <a:avLst/>
+          </a:prstGeom>
+          <a:solidFill>
+            <a:srgbClr val="DE911D"/>
+          </a:solidFill>
+          <a:ln>
+            <a:noFill/>
+          </a:ln>
+          <a:effectLst/>
+        </p:spPr>
+        <p:style>
+          <a:lnRef idx="1">
+            <a:schemeClr val="accent1"/>
+          </a:lnRef>
+          <a:fillRef idx="3">
+            <a:schemeClr val="accent1"/>
+          </a:fillRef>
+          <a:effectRef idx="2">
+            <a:schemeClr val="accent1"/>
+          </a:effectRef>
+          <a:fontRef idx="minor">
+            <a:schemeClr val="lt1"/>
+          </a:fontRef>
+        </p:style>
+        <p:txBody>
+          <a:bodyPr rtlCol="0" anchor="ctr"/>
+          <a:lstStyle/>
+          <a:p>
+            <a:pPr algn="ctr"/>
+          </a:p>
+        </p:txBody>
+      </p:sp>
+      <p:sp>
+        <p:nvSpPr>
+          <p:cNvPr id="3" name="TextBox 2"/>
+          <p:cNvSpPr txBox="1"/>
+          <p:nvPr/>
+        </p:nvSpPr>
+        <p:spPr>
+          <a:xfrm>
+            <a:off x="548640" y="502920"/>
+            <a:ext cx="502920" cy="502920"/>
+          </a:xfrm>
+          <a:prstGeom prst="rect">
+            <a:avLst/>
+          </a:prstGeom>
+          <a:noFill/>
+        </p:spPr>
+        <p:txBody>
+          <a:bodyPr wrap="square">
+            <a:spAutoFit/>
+          </a:bodyPr>
+          <a:lstStyle/>
+          <a:p>
+            <a:pPr algn="ctr"/>
+            <a:r>
+              <a:rPr sz="2000" b="0">
+                <a:solidFill>
+                  <a:srgbClr val="0A1F33"/>
+                </a:solidFill>
+                <a:latin typeface="Calibri"/>
+              </a:rPr>
+              <a:t>?</a:t>
+            </a:r>
+          </a:p>
+        </p:txBody>
+      </p:sp>
+      <p:sp>
+        <p:nvSpPr>
+          <p:cNvPr id="4" name="TextBox 3"/>
+          <p:cNvSpPr txBox="1"/>
+          <p:nvPr/>
+        </p:nvSpPr>
+        <p:spPr>
+          <a:xfrm>
+            <a:off x="1234440" y="530352"/>
+            <a:ext cx="9144000" cy="457200"/>
+          </a:xfrm>
+          <a:prstGeom prst="rect">
+            <a:avLst/>
+          </a:prstGeom>
+          <a:noFill/>
+        </p:spPr>
+        <p:txBody>
+          <a:bodyPr wrap="square">
+            <a:spAutoFit/>
+          </a:bodyPr>
+          <a:lstStyle/>
+          <a:p>
+            <a:r>
+              <a:rPr sz="1400" b="1">
+                <a:solidFill>
+                  <a:srgbClr val="DE911D"/>
+                </a:solidFill>
+                <a:latin typeface="Calibri"/>
+              </a:rPr>
+              <a:t>CASO 1 · ¿QUÉ DECIDE LA PERSONA ÁRBITRA?</a:t>
+            </a:r>
+          </a:p>
+        </p:txBody>
+      </p:sp>
+      <p:sp>
+        <p:nvSpPr>
+          <p:cNvPr id="5" name="TextBox 4"/>
+          <p:cNvSpPr txBox="1"/>
+          <p:nvPr/>
+        </p:nvSpPr>
+        <p:spPr>
+          <a:xfrm>
+            <a:off x="548640" y="1051560"/>
+            <a:ext cx="11064240" cy="822960"/>
+          </a:xfrm>
+          <a:prstGeom prst="rect">
+            <a:avLst/>
+          </a:prstGeom>
+          <a:noFill/>
+        </p:spPr>
+        <p:txBody>
+          <a:bodyPr wrap="square">
+            <a:spAutoFit/>
+          </a:bodyPr>
+          <a:lstStyle/>
+          <a:p>
+            <a:r>
+              <a:rPr sz="2600" b="1">
+                <a:solidFill>
+                  <a:srgbClr val="0A1F33"/>
+                </a:solidFill>
+                <a:latin typeface="Cambria"/>
+              </a:rPr>
+              <a:t>La ronda 2 de un suizo de 8 jugadores</a:t>
+            </a:r>
+          </a:p>
+        </p:txBody>
+      </p:sp>
+      <p:sp>
+        <p:nvSpPr>
+          <p:cNvPr id="6" name="Rectangle 5"/>
+          <p:cNvSpPr/>
+          <p:nvPr/>
+        </p:nvSpPr>
+        <p:spPr>
+          <a:xfrm>
+            <a:off x="548640" y="1965960"/>
+            <a:ext cx="11064240" cy="4206240"/>
+          </a:xfrm>
+          <a:prstGeom prst="rect">
+            <a:avLst/>
+          </a:prstGeom>
+          <a:solidFill>
+            <a:srgbClr val="F0F4F8"/>
+          </a:solidFill>
+          <a:ln>
+            <a:noFill/>
+          </a:ln>
+          <a:effectLst/>
+        </p:spPr>
+        <p:style>
+          <a:lnRef idx="1">
+            <a:schemeClr val="accent1"/>
+          </a:lnRef>
+          <a:fillRef idx="3">
+            <a:schemeClr val="accent1"/>
+          </a:fillRef>
+          <a:effectRef idx="2">
+            <a:schemeClr val="accent1"/>
+          </a:effectRef>
+          <a:fontRef idx="minor">
+            <a:schemeClr val="lt1"/>
+          </a:fontRef>
+        </p:style>
+        <p:txBody>
+          <a:bodyPr rtlCol="0" anchor="ctr"/>
+          <a:lstStyle/>
+          <a:p>
+            <a:pPr algn="ctr"/>
+          </a:p>
+        </p:txBody>
+      </p:sp>
+      <p:sp>
+        <p:nvSpPr>
+          <p:cNvPr id="7" name="TextBox 6"/>
+          <p:cNvSpPr txBox="1"/>
+          <p:nvPr/>
+        </p:nvSpPr>
+        <p:spPr>
+          <a:xfrm>
+            <a:off x="914400" y="2240280"/>
+            <a:ext cx="10332720" cy="3749039"/>
+          </a:xfrm>
+          <a:prstGeom prst="rect">
+            <a:avLst/>
+          </a:prstGeom>
+          <a:noFill/>
+        </p:spPr>
+        <p:txBody>
+          <a:bodyPr wrap="square">
+            <a:spAutoFit/>
+          </a:bodyPr>
+          <a:lstStyle/>
+          <a:p>
+            <a:r>
+              <a:rPr sz="2000" b="0">
+                <a:solidFill>
+                  <a:srgbClr val="334E68"/>
+                </a:solidFill>
+                <a:latin typeface="Calibri"/>
+              </a:rPr>
+              <a:t>Ronda 1 (primero, las blancas): 1–5, 6–2, 3–7, 8–4. Resultados: ganan 1, 2, 7 y 8. ¿Cómo queda la ronda 2?</a:t>
             </a:r>
           </a:p>
         </p:txBody>

--- a/cursos/recursos/formacion-ajedrez/04-sistemas-de-emparejamiento.pptx
+++ b/cursos/recursos/formacion-ajedrez/04-sistemas-de-emparejamiento.pptx
@@ -6210,7 +6210,7 @@
               </a:spcAft>
             </a:pPr>
             <a:r>
-              <a:rPr sz="1400">
+              <a:rPr sz="1200">
                 <a:solidFill>
                   <a:srgbClr val="334E68"/>
                 </a:solidFill>
@@ -6226,7 +6226,7 @@
               </a:spcAft>
             </a:pPr>
             <a:r>
-              <a:rPr sz="1400">
+              <a:rPr sz="1200">
                 <a:solidFill>
                   <a:srgbClr val="334E68"/>
                 </a:solidFill>
@@ -6242,7 +6242,7 @@
               </a:spcAft>
             </a:pPr>
             <a:r>
-              <a:rPr sz="1400">
+              <a:rPr sz="1200">
                 <a:solidFill>
                   <a:srgbClr val="334E68"/>
                 </a:solidFill>
@@ -6258,7 +6258,7 @@
               </a:spcAft>
             </a:pPr>
             <a:r>
-              <a:rPr sz="1400">
+              <a:rPr sz="1200">
                 <a:solidFill>
                   <a:srgbClr val="334E68"/>
                 </a:solidFill>
@@ -6274,7 +6274,7 @@
               </a:spcAft>
             </a:pPr>
             <a:r>
-              <a:rPr sz="1400">
+              <a:rPr sz="1200">
                 <a:solidFill>
                   <a:srgbClr val="334E68"/>
                 </a:solidFill>
@@ -6290,13 +6290,93 @@
               </a:spcAft>
             </a:pPr>
             <a:r>
-              <a:rPr sz="1400">
+              <a:rPr sz="1200">
                 <a:solidFill>
                   <a:srgbClr val="334E68"/>
                 </a:solidFill>
                 <a:latin typeface="Calibri"/>
               </a:rPr>
               <a:t>6. ¿Cuántas partidas tiene un todos contra todos de 8 jugadores?</a:t>
+            </a:r>
+          </a:p>
+          <a:p>
+            <a:pPr>
+              <a:spcAft>
+                <a:spcPts val="600"/>
+              </a:spcAft>
+            </a:pPr>
+            <a:r>
+              <a:rPr sz="1200">
+                <a:solidFill>
+                  <a:srgbClr val="334E68"/>
+                </a:solidFill>
+                <a:latin typeface="Calibri"/>
+              </a:rPr>
+              <a:t>7. ¿Puede la diferencia entre las partidas que un jugador tuvo con blancas y con negras llegar a ser de 3?</a:t>
+            </a:r>
+          </a:p>
+          <a:p>
+            <a:pPr>
+              <a:spcAft>
+                <a:spcPts val="600"/>
+              </a:spcAft>
+            </a:pPr>
+            <a:r>
+              <a:rPr sz="1200">
+                <a:solidFill>
+                  <a:srgbClr val="334E68"/>
+                </a:solidFill>
+                <a:latin typeface="Calibri"/>
+              </a:rPr>
+              <a:t>8. ¿Puede un jugador recibir el mismo color tres veces seguidas en un suizo?</a:t>
+            </a:r>
+          </a:p>
+          <a:p>
+            <a:pPr>
+              <a:spcAft>
+                <a:spcPts val="600"/>
+              </a:spcAft>
+            </a:pPr>
+            <a:r>
+              <a:rPr sz="1200">
+                <a:solidFill>
+                  <a:srgbClr val="334E68"/>
+                </a:solidFill>
+                <a:latin typeface="Calibri"/>
+              </a:rPr>
+              <a:t>9. Un jugador falta a una ronda sin avisar. ¿Qué se asume?</a:t>
+            </a:r>
+          </a:p>
+          <a:p>
+            <a:pPr>
+              <a:spcAft>
+                <a:spcPts val="600"/>
+              </a:spcAft>
+            </a:pPr>
+            <a:r>
+              <a:rPr sz="1200">
+                <a:solidFill>
+                  <a:srgbClr val="334E68"/>
+                </a:solidFill>
+                <a:latin typeface="Calibri"/>
+              </a:rPr>
+              <a:t>10. ¿Por qué el desempate habitual en un todos contra todos es el Sonneborn-Berger y no el Buchholz?</a:t>
+            </a:r>
+          </a:p>
+          <a:p>
+            <a:pPr>
+              <a:spcAft>
+                <a:spcPts val="600"/>
+              </a:spcAft>
+            </a:pPr>
+            <a:r>
+              <a:rPr sz="1200">
+                <a:solidFill>
+                  <a:srgbClr val="334E68"/>
+                </a:solidFill>
+                <a:latin typeface="Calibri"/>
+              </a:rPr>
+              <a:t>11. ¿Puede el árbitro cambiar un emparejamiento ya publicado para favorecer a un estudiante?</a:t>
             </a:r>
           </a:p>
         </p:txBody>
